--- a/report/Obshie-trebovaniya-k-oformleniyu-kursovogo-proekta.pptx
+++ b/report/Obshie-trebovaniya-k-oformleniyu-kursovogo-proekta.pptx
@@ -5,33 +5,41 @@
     <p:sldMasterId id="2147483648" r:id="rId1"/>
   </p:sldMasterIdLst>
   <p:notesMasterIdLst>
-    <p:notesMasterId r:id="rId12"/>
+    <p:notesMasterId r:id="rId4"/>
   </p:notesMasterIdLst>
   <p:sldIdLst>
-    <p:sldId id="256" r:id="rId2"/>
-    <p:sldId id="257" r:id="rId3"/>
-    <p:sldId id="258" r:id="rId4"/>
-    <p:sldId id="259" r:id="rId5"/>
-    <p:sldId id="260" r:id="rId6"/>
-    <p:sldId id="261" r:id="rId7"/>
-    <p:sldId id="262" r:id="rId8"/>
-    <p:sldId id="263" r:id="rId9"/>
-    <p:sldId id="264" r:id="rId10"/>
-    <p:sldId id="265" r:id="rId11"/>
+    <p:sldId id="256" r:id="rId3"/>
+    <p:sldId id="257" r:id="rId5"/>
+    <p:sldId id="258" r:id="rId6"/>
+    <p:sldId id="259" r:id="rId7"/>
+    <p:sldId id="260" r:id="rId8"/>
+    <p:sldId id="261" r:id="rId9"/>
+    <p:sldId id="262" r:id="rId10"/>
+    <p:sldId id="263" r:id="rId11"/>
+    <p:sldId id="264" r:id="rId12"/>
+    <p:sldId id="265" r:id="rId13"/>
   </p:sldIdLst>
   <p:sldSz cx="14630400" cy="8229600"/>
   <p:notesSz cx="8229600" cy="14630400"/>
   <p:embeddedFontLst>
     <p:embeddedFont>
-      <p:font typeface="Calibri" panose="020F0502020204030204" pitchFamily="34" charset="0"/>
-      <p:regular r:id="rId13"/>
-      <p:bold r:id="rId14"/>
-      <p:italic r:id="rId15"/>
-      <p:boldItalic r:id="rId16"/>
+      <p:font typeface="Patrick Hand" panose="00000500000000000000" pitchFamily="34" charset="0"/>
+      <p:regular r:id="rId17"/>
     </p:embeddedFont>
     <p:embeddedFont>
-      <p:font typeface="Patrick Hand" panose="020B0604020202020204" charset="0"/>
-      <p:regular r:id="rId17"/>
+      <p:font typeface="Patrick Hand" panose="00000500000000000000" pitchFamily="34" charset="-122"/>
+      <p:regular r:id="rId18"/>
+    </p:embeddedFont>
+    <p:embeddedFont>
+      <p:font typeface="Patrick Hand" panose="00000500000000000000" pitchFamily="34" charset="-120"/>
+      <p:regular r:id="rId19"/>
+    </p:embeddedFont>
+    <p:embeddedFont>
+      <p:font typeface="Calibri" panose="020F0502020204030204" charset="0"/>
+      <p:regular r:id="rId20"/>
+      <p:bold r:id="rId21"/>
+      <p:italic r:id="rId22"/>
+      <p:boldItalic r:id="rId23"/>
     </p:embeddedFont>
   </p:embeddedFontLst>
   <p:defaultTextStyle>
@@ -129,11 +137,6 @@
       </a:defRPr>
     </a:lvl9pPr>
   </p:defaultTextStyle>
-  <p:extLst>
-    <p:ext uri="{EFAFB233-063F-42B5-8137-9DF3F51BA10A}">
-      <p15:sldGuideLst xmlns:p15="http://schemas.microsoft.com/office/powerpoint/2012/main"/>
-    </p:ext>
-  </p:extLst>
 </p:presentation>
 </file>
 
@@ -160,11 +163,6 @@
         </a:xfrm>
       </p:grpSpPr>
     </p:spTree>
-    <p:extLst>
-      <p:ext uri="{BB962C8B-B14F-4D97-AF65-F5344CB8AC3E}">
-        <p14:creationId xmlns:p14="http://schemas.microsoft.com/office/powerpoint/2010/main" val="2548299865"/>
-      </p:ext>
-    </p:extLst>
   </p:cSld>
   <p:clrMap bg1="lt1" tx1="dk1" bg2="lt2" tx2="dk2" accent1="accent1" accent2="accent2" accent3="accent3" accent4="accent4" accent5="accent5" accent6="accent6" hlink="hlink" folHlink="folHlink"/>
   <p:notesStyle>
@@ -327,18 +325,12 @@
           <a:p>
             <a:fld id="{F7021451-1387-4CA6-816F-3879F97B5CBC}" type="slidenum">
               <a:rPr lang="en-US"/>
-              <a:t>1</a:t>
             </a:fld>
             <a:endParaRPr lang="en-US"/>
           </a:p>
         </p:txBody>
       </p:sp>
     </p:spTree>
-    <p:extLst>
-      <p:ext uri="{BB962C8B-B14F-4D97-AF65-F5344CB8AC3E}">
-        <p14:creationId xmlns:p14="http://schemas.microsoft.com/office/powerpoint/2010/main" val="1024086991"/>
-      </p:ext>
-    </p:extLst>
   </p:cSld>
   <p:clrMapOvr>
     <a:masterClrMapping/>
@@ -411,18 +403,12 @@
           <a:p>
             <a:fld id="{F7021451-1387-4CA6-816F-3879F97B5CBC}" type="slidenum">
               <a:rPr lang="en-US"/>
-              <a:t>10</a:t>
             </a:fld>
             <a:endParaRPr lang="en-US"/>
           </a:p>
         </p:txBody>
       </p:sp>
     </p:spTree>
-    <p:extLst>
-      <p:ext uri="{BB962C8B-B14F-4D97-AF65-F5344CB8AC3E}">
-        <p14:creationId xmlns:p14="http://schemas.microsoft.com/office/powerpoint/2010/main" val="1024086991"/>
-      </p:ext>
-    </p:extLst>
   </p:cSld>
   <p:clrMapOvr>
     <a:masterClrMapping/>
@@ -495,18 +481,12 @@
           <a:p>
             <a:fld id="{F7021451-1387-4CA6-816F-3879F97B5CBC}" type="slidenum">
               <a:rPr lang="en-US"/>
-              <a:t>2</a:t>
             </a:fld>
             <a:endParaRPr lang="en-US"/>
           </a:p>
         </p:txBody>
       </p:sp>
     </p:spTree>
-    <p:extLst>
-      <p:ext uri="{BB962C8B-B14F-4D97-AF65-F5344CB8AC3E}">
-        <p14:creationId xmlns:p14="http://schemas.microsoft.com/office/powerpoint/2010/main" val="1024086991"/>
-      </p:ext>
-    </p:extLst>
   </p:cSld>
   <p:clrMapOvr>
     <a:masterClrMapping/>
@@ -579,18 +559,12 @@
           <a:p>
             <a:fld id="{F7021451-1387-4CA6-816F-3879F97B5CBC}" type="slidenum">
               <a:rPr lang="en-US"/>
-              <a:t>3</a:t>
             </a:fld>
             <a:endParaRPr lang="en-US"/>
           </a:p>
         </p:txBody>
       </p:sp>
     </p:spTree>
-    <p:extLst>
-      <p:ext uri="{BB962C8B-B14F-4D97-AF65-F5344CB8AC3E}">
-        <p14:creationId xmlns:p14="http://schemas.microsoft.com/office/powerpoint/2010/main" val="1024086991"/>
-      </p:ext>
-    </p:extLst>
   </p:cSld>
   <p:clrMapOvr>
     <a:masterClrMapping/>
@@ -663,18 +637,12 @@
           <a:p>
             <a:fld id="{F7021451-1387-4CA6-816F-3879F97B5CBC}" type="slidenum">
               <a:rPr lang="en-US"/>
-              <a:t>4</a:t>
             </a:fld>
             <a:endParaRPr lang="en-US"/>
           </a:p>
         </p:txBody>
       </p:sp>
     </p:spTree>
-    <p:extLst>
-      <p:ext uri="{BB962C8B-B14F-4D97-AF65-F5344CB8AC3E}">
-        <p14:creationId xmlns:p14="http://schemas.microsoft.com/office/powerpoint/2010/main" val="1024086991"/>
-      </p:ext>
-    </p:extLst>
   </p:cSld>
   <p:clrMapOvr>
     <a:masterClrMapping/>
@@ -747,18 +715,12 @@
           <a:p>
             <a:fld id="{F7021451-1387-4CA6-816F-3879F97B5CBC}" type="slidenum">
               <a:rPr lang="en-US"/>
-              <a:t>5</a:t>
             </a:fld>
             <a:endParaRPr lang="en-US"/>
           </a:p>
         </p:txBody>
       </p:sp>
     </p:spTree>
-    <p:extLst>
-      <p:ext uri="{BB962C8B-B14F-4D97-AF65-F5344CB8AC3E}">
-        <p14:creationId xmlns:p14="http://schemas.microsoft.com/office/powerpoint/2010/main" val="1024086991"/>
-      </p:ext>
-    </p:extLst>
   </p:cSld>
   <p:clrMapOvr>
     <a:masterClrMapping/>
@@ -831,18 +793,12 @@
           <a:p>
             <a:fld id="{F7021451-1387-4CA6-816F-3879F97B5CBC}" type="slidenum">
               <a:rPr lang="en-US"/>
-              <a:t>6</a:t>
             </a:fld>
             <a:endParaRPr lang="en-US"/>
           </a:p>
         </p:txBody>
       </p:sp>
     </p:spTree>
-    <p:extLst>
-      <p:ext uri="{BB962C8B-B14F-4D97-AF65-F5344CB8AC3E}">
-        <p14:creationId xmlns:p14="http://schemas.microsoft.com/office/powerpoint/2010/main" val="1024086991"/>
-      </p:ext>
-    </p:extLst>
   </p:cSld>
   <p:clrMapOvr>
     <a:masterClrMapping/>
@@ -915,18 +871,12 @@
           <a:p>
             <a:fld id="{F7021451-1387-4CA6-816F-3879F97B5CBC}" type="slidenum">
               <a:rPr lang="en-US"/>
-              <a:t>7</a:t>
             </a:fld>
             <a:endParaRPr lang="en-US"/>
           </a:p>
         </p:txBody>
       </p:sp>
     </p:spTree>
-    <p:extLst>
-      <p:ext uri="{BB962C8B-B14F-4D97-AF65-F5344CB8AC3E}">
-        <p14:creationId xmlns:p14="http://schemas.microsoft.com/office/powerpoint/2010/main" val="1024086991"/>
-      </p:ext>
-    </p:extLst>
   </p:cSld>
   <p:clrMapOvr>
     <a:masterClrMapping/>
@@ -999,18 +949,12 @@
           <a:p>
             <a:fld id="{F7021451-1387-4CA6-816F-3879F97B5CBC}" type="slidenum">
               <a:rPr lang="en-US"/>
-              <a:t>8</a:t>
             </a:fld>
             <a:endParaRPr lang="en-US"/>
           </a:p>
         </p:txBody>
       </p:sp>
     </p:spTree>
-    <p:extLst>
-      <p:ext uri="{BB962C8B-B14F-4D97-AF65-F5344CB8AC3E}">
-        <p14:creationId xmlns:p14="http://schemas.microsoft.com/office/powerpoint/2010/main" val="1024086991"/>
-      </p:ext>
-    </p:extLst>
   </p:cSld>
   <p:clrMapOvr>
     <a:masterClrMapping/>
@@ -1083,18 +1027,12 @@
           <a:p>
             <a:fld id="{F7021451-1387-4CA6-816F-3879F97B5CBC}" type="slidenum">
               <a:rPr lang="en-US"/>
-              <a:t>9</a:t>
             </a:fld>
             <a:endParaRPr lang="en-US"/>
           </a:p>
         </p:txBody>
       </p:sp>
     </p:spTree>
-    <p:extLst>
-      <p:ext uri="{BB962C8B-B14F-4D97-AF65-F5344CB8AC3E}">
-        <p14:creationId xmlns:p14="http://schemas.microsoft.com/office/powerpoint/2010/main" val="1024086991"/>
-      </p:ext>
-    </p:extLst>
   </p:cSld>
   <p:clrMapOvr>
     <a:masterClrMapping/>
@@ -1166,7 +1104,6 @@
           <a:solidFill>
             <a:srgbClr val="D9D9D9"/>
           </a:solidFill>
-          <a:ln/>
         </p:spPr>
       </p:sp>
       <p:sp>
@@ -1186,7 +1123,6 @@
           <a:solidFill>
             <a:srgbClr val="F7F7F7"/>
           </a:solidFill>
-          <a:ln/>
         </p:spPr>
       </p:sp>
       <p:pic>
@@ -1257,7 +1193,6 @@
           <a:solidFill>
             <a:srgbClr val="D9D9D9"/>
           </a:solidFill>
-          <a:ln/>
         </p:spPr>
       </p:sp>
       <p:sp>
@@ -1277,7 +1212,6 @@
           <a:solidFill>
             <a:srgbClr val="F7F7F7"/>
           </a:solidFill>
-          <a:ln/>
         </p:spPr>
       </p:sp>
       <p:pic>
@@ -1348,7 +1282,6 @@
           <a:solidFill>
             <a:srgbClr val="D9D9D9"/>
           </a:solidFill>
-          <a:ln/>
         </p:spPr>
       </p:sp>
       <p:sp>
@@ -1368,7 +1301,6 @@
           <a:solidFill>
             <a:srgbClr val="F7F7F7"/>
           </a:solidFill>
-          <a:ln/>
         </p:spPr>
       </p:sp>
       <p:pic>
@@ -1439,7 +1371,6 @@
           <a:solidFill>
             <a:srgbClr val="D9D9D9"/>
           </a:solidFill>
-          <a:ln/>
         </p:spPr>
       </p:sp>
       <p:sp>
@@ -1459,7 +1390,6 @@
           <a:solidFill>
             <a:srgbClr val="F7F7F7"/>
           </a:solidFill>
-          <a:ln/>
         </p:spPr>
       </p:sp>
       <p:pic>
@@ -1530,7 +1460,6 @@
           <a:solidFill>
             <a:srgbClr val="D9D9D9"/>
           </a:solidFill>
-          <a:ln/>
         </p:spPr>
       </p:sp>
       <p:sp>
@@ -1550,7 +1479,6 @@
           <a:solidFill>
             <a:srgbClr val="F7F7F7"/>
           </a:solidFill>
-          <a:ln/>
         </p:spPr>
       </p:sp>
       <p:pic>
@@ -1621,7 +1549,6 @@
           <a:solidFill>
             <a:srgbClr val="D9D9D9"/>
           </a:solidFill>
-          <a:ln/>
         </p:spPr>
       </p:sp>
       <p:sp>
@@ -1641,7 +1568,6 @@
           <a:solidFill>
             <a:srgbClr val="F7F7F7"/>
           </a:solidFill>
-          <a:ln/>
         </p:spPr>
       </p:sp>
       <p:pic>
@@ -1712,7 +1638,6 @@
           <a:solidFill>
             <a:srgbClr val="D9D9D9"/>
           </a:solidFill>
-          <a:ln/>
         </p:spPr>
       </p:sp>
       <p:sp>
@@ -1732,7 +1657,6 @@
           <a:solidFill>
             <a:srgbClr val="F7F7F7"/>
           </a:solidFill>
-          <a:ln/>
         </p:spPr>
       </p:sp>
       <p:pic>
@@ -1803,7 +1727,6 @@
           <a:solidFill>
             <a:srgbClr val="D9D9D9"/>
           </a:solidFill>
-          <a:ln/>
         </p:spPr>
       </p:sp>
       <p:sp>
@@ -1823,7 +1746,6 @@
           <a:solidFill>
             <a:srgbClr val="F7F7F7"/>
           </a:solidFill>
-          <a:ln/>
         </p:spPr>
       </p:sp>
       <p:pic>
@@ -1894,7 +1816,6 @@
           <a:solidFill>
             <a:srgbClr val="D9D9D9"/>
           </a:solidFill>
-          <a:ln/>
         </p:spPr>
       </p:sp>
       <p:sp>
@@ -1914,7 +1835,6 @@
           <a:solidFill>
             <a:srgbClr val="F7F7F7"/>
           </a:solidFill>
-          <a:ln/>
         </p:spPr>
       </p:sp>
       <p:pic>
@@ -1985,7 +1905,6 @@
           <a:solidFill>
             <a:srgbClr val="D9D9D9"/>
           </a:solidFill>
-          <a:ln/>
         </p:spPr>
       </p:sp>
       <p:sp>
@@ -2005,7 +1924,6 @@
           <a:solidFill>
             <a:srgbClr val="F7F7F7"/>
           </a:solidFill>
-          <a:ln/>
         </p:spPr>
       </p:sp>
       <p:pic>
@@ -2103,7 +2021,7 @@
         <a:spcBef>
           <a:spcPct val="20000"/>
         </a:spcBef>
-        <a:buFont typeface="Arial" pitchFamily="34" charset="0"/>
+        <a:buFont typeface="Arial" panose="020B0604020202020204" pitchFamily="34" charset="0"/>
         <a:buChar char="•"/>
         <a:defRPr sz="3200" kern="1200">
           <a:solidFill>
@@ -2118,7 +2036,7 @@
         <a:spcBef>
           <a:spcPct val="20000"/>
         </a:spcBef>
-        <a:buFont typeface="Arial" pitchFamily="34" charset="0"/>
+        <a:buFont typeface="Arial" panose="020B0604020202020204" pitchFamily="34" charset="0"/>
         <a:buChar char="–"/>
         <a:defRPr sz="2800" kern="1200">
           <a:solidFill>
@@ -2133,7 +2051,7 @@
         <a:spcBef>
           <a:spcPct val="20000"/>
         </a:spcBef>
-        <a:buFont typeface="Arial" pitchFamily="34" charset="0"/>
+        <a:buFont typeface="Arial" panose="020B0604020202020204" pitchFamily="34" charset="0"/>
         <a:buChar char="•"/>
         <a:defRPr sz="2400" kern="1200">
           <a:solidFill>
@@ -2148,7 +2066,7 @@
         <a:spcBef>
           <a:spcPct val="20000"/>
         </a:spcBef>
-        <a:buFont typeface="Arial" pitchFamily="34" charset="0"/>
+        <a:buFont typeface="Arial" panose="020B0604020202020204" pitchFamily="34" charset="0"/>
         <a:buChar char="–"/>
         <a:defRPr sz="2000" kern="1200">
           <a:solidFill>
@@ -2163,7 +2081,7 @@
         <a:spcBef>
           <a:spcPct val="20000"/>
         </a:spcBef>
-        <a:buFont typeface="Arial" pitchFamily="34" charset="0"/>
+        <a:buFont typeface="Arial" panose="020B0604020202020204" pitchFamily="34" charset="0"/>
         <a:buChar char="»"/>
         <a:defRPr sz="2000" kern="1200">
           <a:solidFill>
@@ -2178,7 +2096,7 @@
         <a:spcBef>
           <a:spcPct val="20000"/>
         </a:spcBef>
-        <a:buFont typeface="Arial" pitchFamily="34" charset="0"/>
+        <a:buFont typeface="Arial" panose="020B0604020202020204" pitchFamily="34" charset="0"/>
         <a:buChar char="•"/>
         <a:defRPr sz="2000" kern="1200">
           <a:solidFill>
@@ -2193,7 +2111,7 @@
         <a:spcBef>
           <a:spcPct val="20000"/>
         </a:spcBef>
-        <a:buFont typeface="Arial" pitchFamily="34" charset="0"/>
+        <a:buFont typeface="Arial" panose="020B0604020202020204" pitchFamily="34" charset="0"/>
         <a:buChar char="•"/>
         <a:defRPr sz="2000" kern="1200">
           <a:solidFill>
@@ -2208,7 +2126,7 @@
         <a:spcBef>
           <a:spcPct val="20000"/>
         </a:spcBef>
-        <a:buFont typeface="Arial" pitchFamily="34" charset="0"/>
+        <a:buFont typeface="Arial" panose="020B0604020202020204" pitchFamily="34" charset="0"/>
         <a:buChar char="•"/>
         <a:defRPr sz="2000" kern="1200">
           <a:solidFill>
@@ -2223,7 +2141,7 @@
         <a:spcBef>
           <a:spcPct val="20000"/>
         </a:spcBef>
-        <a:buFont typeface="Arial" pitchFamily="34" charset="0"/>
+        <a:buFont typeface="Arial" panose="020B0604020202020204" pitchFamily="34" charset="0"/>
         <a:buChar char="•"/>
         <a:defRPr sz="2000" kern="1200">
           <a:solidFill>
@@ -2336,7 +2254,7 @@
 
 <file path=ppt/slides/slide1.xml><?xml version="1.0" encoding="utf-8"?>
 <p:sld xmlns:a="http://schemas.openxmlformats.org/drawingml/2006/main" xmlns:r="http://schemas.openxmlformats.org/officeDocument/2006/relationships" xmlns:p="http://schemas.openxmlformats.org/presentationml/2006/main">
-  <p:cSld name="Slide 1">
+  <p:cSld>
     <p:spTree>
       <p:nvGrpSpPr>
         <p:cNvPr id="1" name=""/>
@@ -2360,7 +2278,7 @@
           <p:nvPr/>
         </p:nvPicPr>
         <p:blipFill>
-          <a:blip r:embed="rId3"/>
+          <a:blip r:embed="rId1"/>
           <a:stretch>
             <a:fillRect/>
           </a:stretch>
@@ -2390,7 +2308,6 @@
             <a:avLst/>
           </a:prstGeom>
           <a:noFill/>
-          <a:ln/>
         </p:spPr>
         <p:txBody>
           <a:bodyPr wrap="square" lIns="0" tIns="0" rIns="0" bIns="0" rtlCol="0" anchor="t"/>
@@ -2407,9 +2324,9 @@
                 <a:solidFill>
                   <a:srgbClr val="383838"/>
                 </a:solidFill>
-                <a:latin typeface="Patrick Hand" pitchFamily="34" charset="0"/>
-                <a:ea typeface="Patrick Hand" pitchFamily="34" charset="-122"/>
-                <a:cs typeface="Patrick Hand" pitchFamily="34" charset="-120"/>
+                <a:latin typeface="Patrick Hand" panose="00000500000000000000" pitchFamily="34" charset="0"/>
+                <a:ea typeface="Patrick Hand" panose="00000500000000000000" pitchFamily="34" charset="-122"/>
+                <a:cs typeface="Patrick Hand" panose="00000500000000000000" pitchFamily="34" charset="-120"/>
               </a:rPr>
               <a:t>Общие требования к оформлению курсового проекта</a:t>
             </a:r>
@@ -2432,7 +2349,6 @@
             <a:avLst/>
           </a:prstGeom>
           <a:noFill/>
-          <a:ln/>
         </p:spPr>
         <p:txBody>
           <a:bodyPr wrap="none" lIns="0" tIns="0" rIns="0" bIns="0" rtlCol="0" anchor="t"/>
@@ -2449,9 +2365,9 @@
                 <a:solidFill>
                   <a:srgbClr val="383838"/>
                 </a:solidFill>
-                <a:latin typeface="Patrick Hand" pitchFamily="34" charset="0"/>
-                <a:ea typeface="Patrick Hand" pitchFamily="34" charset="-122"/>
-                <a:cs typeface="Patrick Hand" pitchFamily="34" charset="-120"/>
+                <a:latin typeface="Patrick Hand" panose="00000500000000000000" pitchFamily="34" charset="0"/>
+                <a:ea typeface="Patrick Hand" panose="00000500000000000000" pitchFamily="34" charset="-122"/>
+                <a:cs typeface="Patrick Hand" panose="00000500000000000000" pitchFamily="34" charset="-120"/>
               </a:rPr>
               <a:t>ПК МУКР</a:t>
             </a:r>
@@ -2469,7 +2385,7 @@
 
 <file path=ppt/slides/slide10.xml><?xml version="1.0" encoding="utf-8"?>
 <p:sld xmlns:a="http://schemas.openxmlformats.org/drawingml/2006/main" xmlns:r="http://schemas.openxmlformats.org/officeDocument/2006/relationships" xmlns:p="http://schemas.openxmlformats.org/presentationml/2006/main">
-  <p:cSld name="Slide 10">
+  <p:cSld>
     <p:spTree>
       <p:nvGrpSpPr>
         <p:cNvPr id="1" name=""/>
@@ -2499,7 +2415,6 @@
             <a:avLst/>
           </a:prstGeom>
           <a:noFill/>
-          <a:ln/>
         </p:spPr>
         <p:txBody>
           <a:bodyPr wrap="none" lIns="0" tIns="0" rIns="0" bIns="0" rtlCol="0" anchor="t"/>
@@ -2516,9 +2431,9 @@
                 <a:solidFill>
                   <a:srgbClr val="383838"/>
                 </a:solidFill>
-                <a:latin typeface="Patrick Hand" pitchFamily="34" charset="0"/>
-                <a:ea typeface="Patrick Hand" pitchFamily="34" charset="-122"/>
-                <a:cs typeface="Patrick Hand" pitchFamily="34" charset="-120"/>
+                <a:latin typeface="Patrick Hand" panose="00000500000000000000" pitchFamily="34" charset="0"/>
+                <a:ea typeface="Patrick Hand" panose="00000500000000000000" pitchFamily="34" charset="-122"/>
+                <a:cs typeface="Patrick Hand" panose="00000500000000000000" pitchFamily="34" charset="-120"/>
               </a:rPr>
               <a:t>12. Критерии оценки (пример)</a:t>
             </a:r>
@@ -2541,7 +2456,6 @@
             <a:avLst/>
           </a:prstGeom>
           <a:noFill/>
-          <a:ln/>
         </p:spPr>
         <p:txBody>
           <a:bodyPr wrap="none" lIns="0" tIns="0" rIns="0" bIns="0" rtlCol="0" anchor="t"/>
@@ -2558,9 +2472,9 @@
                 <a:solidFill>
                   <a:srgbClr val="383838"/>
                 </a:solidFill>
-                <a:latin typeface="Patrick Hand" pitchFamily="34" charset="0"/>
-                <a:ea typeface="Patrick Hand" pitchFamily="34" charset="-122"/>
-                <a:cs typeface="Patrick Hand" pitchFamily="34" charset="-120"/>
+                <a:latin typeface="Patrick Hand" panose="00000500000000000000" pitchFamily="34" charset="0"/>
+                <a:ea typeface="Patrick Hand" panose="00000500000000000000" pitchFamily="34" charset="-122"/>
+                <a:cs typeface="Patrick Hand" panose="00000500000000000000" pitchFamily="34" charset="-120"/>
               </a:rPr>
               <a:t>Минимум для прохождения: 61/100.</a:t>
             </a:r>
@@ -2570,13 +2484,7 @@
       </p:sp>
       <p:sp>
         <p:nvSpPr>
-          <p:cNvPr id="5" name="Прямоугольник 4">
-            <a:extLst>
-              <a:ext uri="{FF2B5EF4-FFF2-40B4-BE49-F238E27FC236}">
-                <a16:creationId xmlns:a16="http://schemas.microsoft.com/office/drawing/2014/main" id="{B938FBC4-8172-43D3-AC75-B497107C7C38}"/>
-              </a:ext>
-            </a:extLst>
-          </p:cNvPr>
+          <p:cNvPr id="5" name="Прямоугольник 4"/>
           <p:cNvSpPr/>
           <p:nvPr/>
         </p:nvSpPr>
@@ -2631,7 +2539,7 @@
           <p:nvPr/>
         </p:nvPicPr>
         <p:blipFill>
-          <a:blip r:embed="rId3"/>
+          <a:blip r:embed="rId1"/>
           <a:stretch>
             <a:fillRect/>
           </a:stretch>
@@ -2656,7 +2564,7 @@
 
 <file path=ppt/slides/slide2.xml><?xml version="1.0" encoding="utf-8"?>
 <p:sld xmlns:a="http://schemas.openxmlformats.org/drawingml/2006/main" xmlns:r="http://schemas.openxmlformats.org/officeDocument/2006/relationships" xmlns:p="http://schemas.openxmlformats.org/presentationml/2006/main">
-  <p:cSld name="Slide 2">
+  <p:cSld>
     <p:spTree>
       <p:nvGrpSpPr>
         <p:cNvPr id="1" name=""/>
@@ -2686,7 +2594,6 @@
             <a:avLst/>
           </a:prstGeom>
           <a:noFill/>
-          <a:ln/>
         </p:spPr>
         <p:txBody>
           <a:bodyPr wrap="none" lIns="0" tIns="0" rIns="0" bIns="0" rtlCol="0" anchor="t"/>
@@ -2703,9 +2610,9 @@
                 <a:solidFill>
                   <a:srgbClr val="383838"/>
                 </a:solidFill>
-                <a:latin typeface="Patrick Hand" pitchFamily="34" charset="0"/>
-                <a:ea typeface="Patrick Hand" pitchFamily="34" charset="-122"/>
-                <a:cs typeface="Patrick Hand" pitchFamily="34" charset="-120"/>
+                <a:latin typeface="Patrick Hand" panose="00000500000000000000" pitchFamily="34" charset="0"/>
+                <a:ea typeface="Patrick Hand" panose="00000500000000000000" pitchFamily="34" charset="-122"/>
+                <a:cs typeface="Patrick Hand" panose="00000500000000000000" pitchFamily="34" charset="-120"/>
               </a:rPr>
               <a:t>Структура работы и технические требования</a:t>
             </a:r>
@@ -2728,7 +2635,6 @@
             <a:avLst/>
           </a:prstGeom>
           <a:noFill/>
-          <a:ln/>
         </p:spPr>
         <p:txBody>
           <a:bodyPr wrap="none" lIns="0" tIns="0" rIns="0" bIns="0" rtlCol="0" anchor="t"/>
@@ -2745,9 +2651,9 @@
                 <a:solidFill>
                   <a:srgbClr val="383838"/>
                 </a:solidFill>
-                <a:latin typeface="Patrick Hand" pitchFamily="34" charset="0"/>
-                <a:ea typeface="Patrick Hand" pitchFamily="34" charset="-122"/>
-                <a:cs typeface="Patrick Hand" pitchFamily="34" charset="-120"/>
+                <a:latin typeface="Patrick Hand" panose="00000500000000000000" pitchFamily="34" charset="0"/>
+                <a:ea typeface="Patrick Hand" panose="00000500000000000000" pitchFamily="34" charset="-122"/>
+                <a:cs typeface="Patrick Hand" panose="00000500000000000000" pitchFamily="34" charset="-120"/>
               </a:rPr>
               <a:t>1. Структура работы</a:t>
             </a:r>
@@ -2770,7 +2676,6 @@
             <a:avLst/>
           </a:prstGeom>
           <a:noFill/>
-          <a:ln/>
         </p:spPr>
         <p:txBody>
           <a:bodyPr wrap="none" lIns="0" tIns="0" rIns="0" bIns="0" rtlCol="0" anchor="t"/>
@@ -2787,9 +2692,9 @@
                 <a:solidFill>
                   <a:srgbClr val="383838"/>
                 </a:solidFill>
-                <a:latin typeface="Patrick Hand" pitchFamily="34" charset="0"/>
-                <a:ea typeface="Patrick Hand" pitchFamily="34" charset="-122"/>
-                <a:cs typeface="Patrick Hand" pitchFamily="34" charset="-120"/>
+                <a:latin typeface="Patrick Hand" panose="00000500000000000000" pitchFamily="34" charset="0"/>
+                <a:ea typeface="Patrick Hand" panose="00000500000000000000" pitchFamily="34" charset="-122"/>
+                <a:cs typeface="Patrick Hand" panose="00000500000000000000" pitchFamily="34" charset="-120"/>
               </a:rPr>
               <a:t>Работа должна содержать (в порядке):</a:t>
             </a:r>
@@ -2812,7 +2717,6 @@
             <a:avLst/>
           </a:prstGeom>
           <a:noFill/>
-          <a:ln/>
         </p:spPr>
         <p:txBody>
           <a:bodyPr wrap="none" lIns="0" tIns="0" rIns="0" bIns="0" rtlCol="0" anchor="t"/>
@@ -2831,9 +2735,9 @@
                 <a:solidFill>
                   <a:srgbClr val="383838"/>
                 </a:solidFill>
-                <a:latin typeface="Patrick Hand" pitchFamily="34" charset="0"/>
-                <a:ea typeface="Patrick Hand" pitchFamily="34" charset="-122"/>
-                <a:cs typeface="Patrick Hand" pitchFamily="34" charset="-120"/>
+                <a:latin typeface="Patrick Hand" panose="00000500000000000000" pitchFamily="34" charset="0"/>
+                <a:ea typeface="Patrick Hand" panose="00000500000000000000" pitchFamily="34" charset="-122"/>
+                <a:cs typeface="Patrick Hand" panose="00000500000000000000" pitchFamily="34" charset="-120"/>
               </a:rPr>
               <a:t>Титульный лист</a:t>
             </a:r>
@@ -2856,7 +2760,6 @@
             <a:avLst/>
           </a:prstGeom>
           <a:noFill/>
-          <a:ln/>
         </p:spPr>
         <p:txBody>
           <a:bodyPr wrap="none" lIns="0" tIns="0" rIns="0" bIns="0" rtlCol="0" anchor="t"/>
@@ -2875,9 +2778,9 @@
                 <a:solidFill>
                   <a:srgbClr val="383838"/>
                 </a:solidFill>
-                <a:latin typeface="Patrick Hand" pitchFamily="34" charset="0"/>
-                <a:ea typeface="Patrick Hand" pitchFamily="34" charset="-122"/>
-                <a:cs typeface="Patrick Hand" pitchFamily="34" charset="-120"/>
+                <a:latin typeface="Patrick Hand" panose="00000500000000000000" pitchFamily="34" charset="0"/>
+                <a:ea typeface="Patrick Hand" panose="00000500000000000000" pitchFamily="34" charset="-122"/>
+                <a:cs typeface="Patrick Hand" panose="00000500000000000000" pitchFamily="34" charset="-120"/>
               </a:rPr>
               <a:t>Аннотация</a:t>
             </a:r>
@@ -2900,7 +2803,6 @@
             <a:avLst/>
           </a:prstGeom>
           <a:noFill/>
-          <a:ln/>
         </p:spPr>
         <p:txBody>
           <a:bodyPr wrap="none" lIns="0" tIns="0" rIns="0" bIns="0" rtlCol="0" anchor="t"/>
@@ -2919,9 +2821,9 @@
                 <a:solidFill>
                   <a:srgbClr val="383838"/>
                 </a:solidFill>
-                <a:latin typeface="Patrick Hand" pitchFamily="34" charset="0"/>
-                <a:ea typeface="Patrick Hand" pitchFamily="34" charset="-122"/>
-                <a:cs typeface="Patrick Hand" pitchFamily="34" charset="-120"/>
+                <a:latin typeface="Patrick Hand" panose="00000500000000000000" pitchFamily="34" charset="0"/>
+                <a:ea typeface="Patrick Hand" panose="00000500000000000000" pitchFamily="34" charset="-122"/>
+                <a:cs typeface="Patrick Hand" panose="00000500000000000000" pitchFamily="34" charset="-120"/>
               </a:rPr>
               <a:t>Содержание</a:t>
             </a:r>
@@ -2944,7 +2846,6 @@
             <a:avLst/>
           </a:prstGeom>
           <a:noFill/>
-          <a:ln/>
         </p:spPr>
         <p:txBody>
           <a:bodyPr wrap="none" lIns="0" tIns="0" rIns="0" bIns="0" rtlCol="0" anchor="t"/>
@@ -2963,9 +2864,9 @@
                 <a:solidFill>
                   <a:srgbClr val="383838"/>
                 </a:solidFill>
-                <a:latin typeface="Patrick Hand" pitchFamily="34" charset="0"/>
-                <a:ea typeface="Patrick Hand" pitchFamily="34" charset="-122"/>
-                <a:cs typeface="Patrick Hand" pitchFamily="34" charset="-120"/>
+                <a:latin typeface="Patrick Hand" panose="00000500000000000000" pitchFamily="34" charset="0"/>
+                <a:ea typeface="Patrick Hand" panose="00000500000000000000" pitchFamily="34" charset="-122"/>
+                <a:cs typeface="Patrick Hand" panose="00000500000000000000" pitchFamily="34" charset="-120"/>
               </a:rPr>
               <a:t>Введение</a:t>
             </a:r>
@@ -2988,7 +2889,6 @@
             <a:avLst/>
           </a:prstGeom>
           <a:noFill/>
-          <a:ln/>
         </p:spPr>
         <p:txBody>
           <a:bodyPr wrap="none" lIns="0" tIns="0" rIns="0" bIns="0" rtlCol="0" anchor="t"/>
@@ -3007,9 +2907,9 @@
                 <a:solidFill>
                   <a:srgbClr val="383838"/>
                 </a:solidFill>
-                <a:latin typeface="Patrick Hand" pitchFamily="34" charset="0"/>
-                <a:ea typeface="Patrick Hand" pitchFamily="34" charset="-122"/>
-                <a:cs typeface="Patrick Hand" pitchFamily="34" charset="-120"/>
+                <a:latin typeface="Patrick Hand" panose="00000500000000000000" pitchFamily="34" charset="0"/>
+                <a:ea typeface="Patrick Hand" panose="00000500000000000000" pitchFamily="34" charset="-122"/>
+                <a:cs typeface="Patrick Hand" panose="00000500000000000000" pitchFamily="34" charset="-120"/>
               </a:rPr>
               <a:t>Основная часть (главы)</a:t>
             </a:r>
@@ -3032,7 +2932,6 @@
             <a:avLst/>
           </a:prstGeom>
           <a:noFill/>
-          <a:ln/>
         </p:spPr>
         <p:txBody>
           <a:bodyPr wrap="none" lIns="0" tIns="0" rIns="0" bIns="0" rtlCol="0" anchor="t"/>
@@ -3051,9 +2950,9 @@
                 <a:solidFill>
                   <a:srgbClr val="383838"/>
                 </a:solidFill>
-                <a:latin typeface="Patrick Hand" pitchFamily="34" charset="0"/>
-                <a:ea typeface="Patrick Hand" pitchFamily="34" charset="-122"/>
-                <a:cs typeface="Patrick Hand" pitchFamily="34" charset="-120"/>
+                <a:latin typeface="Patrick Hand" panose="00000500000000000000" pitchFamily="34" charset="0"/>
+                <a:ea typeface="Patrick Hand" panose="00000500000000000000" pitchFamily="34" charset="-122"/>
+                <a:cs typeface="Patrick Hand" panose="00000500000000000000" pitchFamily="34" charset="-120"/>
               </a:rPr>
               <a:t>Заключение</a:t>
             </a:r>
@@ -3076,7 +2975,6 @@
             <a:avLst/>
           </a:prstGeom>
           <a:noFill/>
-          <a:ln/>
         </p:spPr>
         <p:txBody>
           <a:bodyPr wrap="none" lIns="0" tIns="0" rIns="0" bIns="0" rtlCol="0" anchor="t"/>
@@ -3095,9 +2993,9 @@
                 <a:solidFill>
                   <a:srgbClr val="383838"/>
                 </a:solidFill>
-                <a:latin typeface="Patrick Hand" pitchFamily="34" charset="0"/>
-                <a:ea typeface="Patrick Hand" pitchFamily="34" charset="-122"/>
-                <a:cs typeface="Patrick Hand" pitchFamily="34" charset="-120"/>
+                <a:latin typeface="Patrick Hand" panose="00000500000000000000" pitchFamily="34" charset="0"/>
+                <a:ea typeface="Patrick Hand" panose="00000500000000000000" pitchFamily="34" charset="-122"/>
+                <a:cs typeface="Patrick Hand" panose="00000500000000000000" pitchFamily="34" charset="-120"/>
               </a:rPr>
               <a:t>Список использованных источников</a:t>
             </a:r>
@@ -3120,7 +3018,6 @@
             <a:avLst/>
           </a:prstGeom>
           <a:noFill/>
-          <a:ln/>
         </p:spPr>
         <p:txBody>
           <a:bodyPr wrap="none" lIns="0" tIns="0" rIns="0" bIns="0" rtlCol="0" anchor="t"/>
@@ -3139,9 +3036,9 @@
                 <a:solidFill>
                   <a:srgbClr val="383838"/>
                 </a:solidFill>
-                <a:latin typeface="Patrick Hand" pitchFamily="34" charset="0"/>
-                <a:ea typeface="Patrick Hand" pitchFamily="34" charset="-122"/>
-                <a:cs typeface="Patrick Hand" pitchFamily="34" charset="-120"/>
+                <a:latin typeface="Patrick Hand" panose="00000500000000000000" pitchFamily="34" charset="0"/>
+                <a:ea typeface="Patrick Hand" panose="00000500000000000000" pitchFamily="34" charset="-122"/>
+                <a:cs typeface="Patrick Hand" panose="00000500000000000000" pitchFamily="34" charset="-120"/>
               </a:rPr>
               <a:t>Приложения</a:t>
             </a:r>
@@ -3164,7 +3061,6 @@
             <a:avLst/>
           </a:prstGeom>
           <a:noFill/>
-          <a:ln/>
         </p:spPr>
         <p:txBody>
           <a:bodyPr wrap="square" lIns="0" tIns="0" rIns="0" bIns="0" rtlCol="0" anchor="t"/>
@@ -3181,9 +3077,9 @@
                 <a:solidFill>
                   <a:srgbClr val="383838"/>
                 </a:solidFill>
-                <a:latin typeface="Patrick Hand" pitchFamily="34" charset="0"/>
-                <a:ea typeface="Patrick Hand" pitchFamily="34" charset="-122"/>
-                <a:cs typeface="Patrick Hand" pitchFamily="34" charset="-120"/>
+                <a:latin typeface="Patrick Hand" panose="00000500000000000000" pitchFamily="34" charset="0"/>
+                <a:ea typeface="Patrick Hand" panose="00000500000000000000" pitchFamily="34" charset="-122"/>
+                <a:cs typeface="Patrick Hand" panose="00000500000000000000" pitchFamily="34" charset="-120"/>
               </a:rPr>
               <a:t>Каждая структурная часть начинается с новой страницы.</a:t>
             </a:r>
@@ -3206,7 +3102,6 @@
             <a:avLst/>
           </a:prstGeom>
           <a:noFill/>
-          <a:ln/>
         </p:spPr>
         <p:txBody>
           <a:bodyPr wrap="none" lIns="0" tIns="0" rIns="0" bIns="0" rtlCol="0" anchor="t"/>
@@ -3223,9 +3118,9 @@
                 <a:solidFill>
                   <a:srgbClr val="383838"/>
                 </a:solidFill>
-                <a:latin typeface="Patrick Hand" pitchFamily="34" charset="0"/>
-                <a:ea typeface="Patrick Hand" pitchFamily="34" charset="-122"/>
-                <a:cs typeface="Patrick Hand" pitchFamily="34" charset="-120"/>
+                <a:latin typeface="Patrick Hand" panose="00000500000000000000" pitchFamily="34" charset="0"/>
+                <a:ea typeface="Patrick Hand" panose="00000500000000000000" pitchFamily="34" charset="-122"/>
+                <a:cs typeface="Patrick Hand" panose="00000500000000000000" pitchFamily="34" charset="-120"/>
               </a:rPr>
               <a:t>2. Технические требования к оформлению текста</a:t>
             </a:r>
@@ -3248,7 +3143,6 @@
             <a:avLst/>
           </a:prstGeom>
           <a:noFill/>
-          <a:ln/>
         </p:spPr>
         <p:txBody>
           <a:bodyPr wrap="square" lIns="0" tIns="0" rIns="0" bIns="0" rtlCol="0" anchor="t"/>
@@ -3266,9 +3160,9 @@
                 <a:solidFill>
                   <a:srgbClr val="383838"/>
                 </a:solidFill>
-                <a:latin typeface="Patrick Hand" pitchFamily="34" charset="0"/>
-                <a:ea typeface="Patrick Hand" pitchFamily="34" charset="-122"/>
-                <a:cs typeface="Patrick Hand" pitchFamily="34" charset="-120"/>
+                <a:latin typeface="Patrick Hand" panose="00000500000000000000" pitchFamily="34" charset="0"/>
+                <a:ea typeface="Patrick Hand" panose="00000500000000000000" pitchFamily="34" charset="-122"/>
+                <a:cs typeface="Patrick Hand" panose="00000500000000000000" pitchFamily="34" charset="-120"/>
               </a:rPr>
               <a:t>Бумага:</a:t>
             </a:r>
@@ -3277,9 +3171,9 @@
                 <a:solidFill>
                   <a:srgbClr val="383838"/>
                 </a:solidFill>
-                <a:latin typeface="Patrick Hand" pitchFamily="34" charset="0"/>
-                <a:ea typeface="Patrick Hand" pitchFamily="34" charset="-122"/>
-                <a:cs typeface="Patrick Hand" pitchFamily="34" charset="-120"/>
+                <a:latin typeface="Patrick Hand" panose="00000500000000000000" pitchFamily="34" charset="0"/>
+                <a:ea typeface="Patrick Hand" panose="00000500000000000000" pitchFamily="34" charset="-122"/>
+                <a:cs typeface="Patrick Hand" panose="00000500000000000000" pitchFamily="34" charset="-120"/>
               </a:rPr>
               <a:t> формат A4 (210×297 мм), печать — на одной стороне листа, белая односортная бумага.</a:t>
             </a:r>
@@ -3302,7 +3196,6 @@
             <a:avLst/>
           </a:prstGeom>
           <a:noFill/>
-          <a:ln/>
         </p:spPr>
         <p:txBody>
           <a:bodyPr wrap="square" lIns="0" tIns="0" rIns="0" bIns="0" rtlCol="0" anchor="t"/>
@@ -3320,9 +3213,9 @@
                 <a:solidFill>
                   <a:srgbClr val="383838"/>
                 </a:solidFill>
-                <a:latin typeface="Patrick Hand" pitchFamily="34" charset="0"/>
-                <a:ea typeface="Patrick Hand" pitchFamily="34" charset="-122"/>
-                <a:cs typeface="Patrick Hand" pitchFamily="34" charset="-120"/>
+                <a:latin typeface="Patrick Hand" panose="00000500000000000000" pitchFamily="34" charset="0"/>
+                <a:ea typeface="Patrick Hand" panose="00000500000000000000" pitchFamily="34" charset="-122"/>
+                <a:cs typeface="Patrick Hand" panose="00000500000000000000" pitchFamily="34" charset="-120"/>
               </a:rPr>
               <a:t>Редактор:</a:t>
             </a:r>
@@ -3331,9 +3224,9 @@
                 <a:solidFill>
                   <a:srgbClr val="383838"/>
                 </a:solidFill>
-                <a:latin typeface="Patrick Hand" pitchFamily="34" charset="0"/>
-                <a:ea typeface="Patrick Hand" pitchFamily="34" charset="-122"/>
-                <a:cs typeface="Patrick Hand" pitchFamily="34" charset="-120"/>
+                <a:latin typeface="Patrick Hand" panose="00000500000000000000" pitchFamily="34" charset="0"/>
+                <a:ea typeface="Patrick Hand" panose="00000500000000000000" pitchFamily="34" charset="-122"/>
+                <a:cs typeface="Patrick Hand" panose="00000500000000000000" pitchFamily="34" charset="-120"/>
               </a:rPr>
               <a:t> MS Word (по возможности использовать встроенные стили и нумерацию).</a:t>
             </a:r>
@@ -3356,7 +3249,6 @@
             <a:avLst/>
           </a:prstGeom>
           <a:noFill/>
-          <a:ln/>
         </p:spPr>
         <p:txBody>
           <a:bodyPr wrap="square" lIns="0" tIns="0" rIns="0" bIns="0" rtlCol="0" anchor="t"/>
@@ -3374,9 +3266,9 @@
                 <a:solidFill>
                   <a:srgbClr val="383838"/>
                 </a:solidFill>
-                <a:latin typeface="Patrick Hand" pitchFamily="34" charset="0"/>
-                <a:ea typeface="Patrick Hand" pitchFamily="34" charset="-122"/>
-                <a:cs typeface="Patrick Hand" pitchFamily="34" charset="-120"/>
+                <a:latin typeface="Patrick Hand" panose="00000500000000000000" pitchFamily="34" charset="0"/>
+                <a:ea typeface="Patrick Hand" panose="00000500000000000000" pitchFamily="34" charset="-122"/>
+                <a:cs typeface="Patrick Hand" panose="00000500000000000000" pitchFamily="34" charset="-120"/>
               </a:rPr>
               <a:t>Шрифт:</a:t>
             </a:r>
@@ -3385,9 +3277,9 @@
                 <a:solidFill>
                   <a:srgbClr val="383838"/>
                 </a:solidFill>
-                <a:latin typeface="Patrick Hand" pitchFamily="34" charset="0"/>
-                <a:ea typeface="Patrick Hand" pitchFamily="34" charset="-122"/>
-                <a:cs typeface="Patrick Hand" pitchFamily="34" charset="-120"/>
+                <a:latin typeface="Patrick Hand" panose="00000500000000000000" pitchFamily="34" charset="0"/>
+                <a:ea typeface="Patrick Hand" panose="00000500000000000000" pitchFamily="34" charset="-122"/>
+                <a:cs typeface="Patrick Hand" panose="00000500000000000000" pitchFamily="34" charset="-120"/>
               </a:rPr>
               <a:t> Times New Roman, размер 12 pt, межстрочный интервал 1,5, выравнивание — по ширине.</a:t>
             </a:r>
@@ -3410,7 +3302,6 @@
             <a:avLst/>
           </a:prstGeom>
           <a:noFill/>
-          <a:ln/>
         </p:spPr>
         <p:txBody>
           <a:bodyPr wrap="square" lIns="0" tIns="0" rIns="0" bIns="0" rtlCol="0" anchor="t"/>
@@ -3428,9 +3319,9 @@
                 <a:solidFill>
                   <a:srgbClr val="383838"/>
                 </a:solidFill>
-                <a:latin typeface="Patrick Hand" pitchFamily="34" charset="0"/>
-                <a:ea typeface="Patrick Hand" pitchFamily="34" charset="-122"/>
-                <a:cs typeface="Patrick Hand" pitchFamily="34" charset="-120"/>
+                <a:latin typeface="Patrick Hand" panose="00000500000000000000" pitchFamily="34" charset="0"/>
+                <a:ea typeface="Patrick Hand" panose="00000500000000000000" pitchFamily="34" charset="-122"/>
+                <a:cs typeface="Patrick Hand" panose="00000500000000000000" pitchFamily="34" charset="-120"/>
               </a:rPr>
               <a:t>Поля:</a:t>
             </a:r>
@@ -3439,9 +3330,9 @@
                 <a:solidFill>
                   <a:srgbClr val="383838"/>
                 </a:solidFill>
-                <a:latin typeface="Patrick Hand" pitchFamily="34" charset="0"/>
-                <a:ea typeface="Patrick Hand" pitchFamily="34" charset="-122"/>
-                <a:cs typeface="Patrick Hand" pitchFamily="34" charset="-120"/>
+                <a:latin typeface="Patrick Hand" panose="00000500000000000000" pitchFamily="34" charset="0"/>
+                <a:ea typeface="Patrick Hand" panose="00000500000000000000" pitchFamily="34" charset="-122"/>
+                <a:cs typeface="Patrick Hand" panose="00000500000000000000" pitchFamily="34" charset="-120"/>
               </a:rPr>
               <a:t> левое — 30 мм, правое — 15 мм, верхнее — 15 мм, нижнее — 20 мм. Расстояние от края до колонтитула — 10 мм.</a:t>
             </a:r>
@@ -3464,7 +3355,6 @@
             <a:avLst/>
           </a:prstGeom>
           <a:noFill/>
-          <a:ln/>
         </p:spPr>
         <p:txBody>
           <a:bodyPr wrap="square" lIns="0" tIns="0" rIns="0" bIns="0" rtlCol="0" anchor="t"/>
@@ -3482,9 +3372,9 @@
                 <a:solidFill>
                   <a:srgbClr val="383838"/>
                 </a:solidFill>
-                <a:latin typeface="Patrick Hand" pitchFamily="34" charset="0"/>
-                <a:ea typeface="Patrick Hand" pitchFamily="34" charset="-122"/>
-                <a:cs typeface="Patrick Hand" pitchFamily="34" charset="-120"/>
+                <a:latin typeface="Patrick Hand" panose="00000500000000000000" pitchFamily="34" charset="0"/>
+                <a:ea typeface="Patrick Hand" panose="00000500000000000000" pitchFamily="34" charset="-122"/>
+                <a:cs typeface="Patrick Hand" panose="00000500000000000000" pitchFamily="34" charset="-120"/>
               </a:rPr>
               <a:t>Колонтитулы:</a:t>
             </a:r>
@@ -3493,9 +3383,9 @@
                 <a:solidFill>
                   <a:srgbClr val="383838"/>
                 </a:solidFill>
-                <a:latin typeface="Patrick Hand" pitchFamily="34" charset="0"/>
-                <a:ea typeface="Patrick Hand" pitchFamily="34" charset="-122"/>
-                <a:cs typeface="Patrick Hand" pitchFamily="34" charset="-120"/>
+                <a:latin typeface="Patrick Hand" panose="00000500000000000000" pitchFamily="34" charset="0"/>
+                <a:ea typeface="Patrick Hand" panose="00000500000000000000" pitchFamily="34" charset="-122"/>
+                <a:cs typeface="Patrick Hand" panose="00000500000000000000" pitchFamily="34" charset="-120"/>
               </a:rPr>
               <a:t> на каждой странице (кроме титульного) — вверху по центру указывается номер страницы, внизу — фамилия и инициалы автора(ов) и номер группы. При смене ориентации страницы положение колонтитулов не меняют.</a:t>
             </a:r>
@@ -3518,7 +3408,6 @@
             <a:avLst/>
           </a:prstGeom>
           <a:noFill/>
-          <a:ln/>
         </p:spPr>
         <p:txBody>
           <a:bodyPr wrap="square" lIns="0" tIns="0" rIns="0" bIns="0" rtlCol="0" anchor="t"/>
@@ -3536,9 +3425,9 @@
                 <a:solidFill>
                   <a:srgbClr val="383838"/>
                 </a:solidFill>
-                <a:latin typeface="Patrick Hand" pitchFamily="34" charset="0"/>
-                <a:ea typeface="Patrick Hand" pitchFamily="34" charset="-122"/>
-                <a:cs typeface="Patrick Hand" pitchFamily="34" charset="-120"/>
+                <a:latin typeface="Patrick Hand" panose="00000500000000000000" pitchFamily="34" charset="0"/>
+                <a:ea typeface="Patrick Hand" panose="00000500000000000000" pitchFamily="34" charset="-122"/>
+                <a:cs typeface="Patrick Hand" panose="00000500000000000000" pitchFamily="34" charset="-120"/>
               </a:rPr>
               <a:t>Шрифт печати</a:t>
             </a:r>
@@ -3547,9 +3436,9 @@
                 <a:solidFill>
                   <a:srgbClr val="383838"/>
                 </a:solidFill>
-                <a:latin typeface="Patrick Hand" pitchFamily="34" charset="0"/>
-                <a:ea typeface="Patrick Hand" pitchFamily="34" charset="-122"/>
-                <a:cs typeface="Patrick Hand" pitchFamily="34" charset="-120"/>
+                <a:latin typeface="Patrick Hand" panose="00000500000000000000" pitchFamily="34" charset="0"/>
+                <a:ea typeface="Patrick Hand" panose="00000500000000000000" pitchFamily="34" charset="-122"/>
+                <a:cs typeface="Patrick Hand" panose="00000500000000000000" pitchFamily="34" charset="-120"/>
               </a:rPr>
               <a:t> — четкий, одинаковая плотность текста. Ручные вписывания (слова, формулы) допускаются только чёрными чернилами; плотность вписанного текста должна соответствовать основному.</a:t>
             </a:r>
@@ -3572,7 +3461,6 @@
             <a:avLst/>
           </a:prstGeom>
           <a:noFill/>
-          <a:ln/>
         </p:spPr>
         <p:txBody>
           <a:bodyPr wrap="square" lIns="0" tIns="0" rIns="0" bIns="0" rtlCol="0" anchor="t"/>
@@ -3590,9 +3478,9 @@
                 <a:solidFill>
                   <a:srgbClr val="383838"/>
                 </a:solidFill>
-                <a:latin typeface="Patrick Hand" pitchFamily="34" charset="0"/>
-                <a:ea typeface="Patrick Hand" pitchFamily="34" charset="-122"/>
-                <a:cs typeface="Patrick Hand" pitchFamily="34" charset="-120"/>
+                <a:latin typeface="Patrick Hand" panose="00000500000000000000" pitchFamily="34" charset="0"/>
+                <a:ea typeface="Patrick Hand" panose="00000500000000000000" pitchFamily="34" charset="-122"/>
+                <a:cs typeface="Patrick Hand" panose="00000500000000000000" pitchFamily="34" charset="-120"/>
               </a:rPr>
               <a:t>Исправления ошибок</a:t>
             </a:r>
@@ -3601,9 +3489,9 @@
                 <a:solidFill>
                   <a:srgbClr val="383838"/>
                 </a:solidFill>
-                <a:latin typeface="Patrick Hand" pitchFamily="34" charset="0"/>
-                <a:ea typeface="Patrick Hand" pitchFamily="34" charset="-122"/>
-                <a:cs typeface="Patrick Hand" pitchFamily="34" charset="-120"/>
+                <a:latin typeface="Patrick Hand" panose="00000500000000000000" pitchFamily="34" charset="0"/>
+                <a:ea typeface="Patrick Hand" panose="00000500000000000000" pitchFamily="34" charset="-122"/>
+                <a:cs typeface="Patrick Hand" panose="00000500000000000000" pitchFamily="34" charset="-120"/>
               </a:rPr>
               <a:t> — подчисткой или закрашиванием белой краской и нанесением исправленного текста печатным или рукописным способом чёрными чернилами.</a:t>
             </a:r>
@@ -3613,13 +3501,7 @@
       </p:sp>
       <p:sp>
         <p:nvSpPr>
-          <p:cNvPr id="22" name="Прямоугольник 21">
-            <a:extLst>
-              <a:ext uri="{FF2B5EF4-FFF2-40B4-BE49-F238E27FC236}">
-                <a16:creationId xmlns:a16="http://schemas.microsoft.com/office/drawing/2014/main" id="{2CF0E024-E853-46E7-958A-8F35B9F86EE5}"/>
-              </a:ext>
-            </a:extLst>
-          </p:cNvPr>
+          <p:cNvPr id="22" name="Прямоугольник 21"/>
           <p:cNvSpPr/>
           <p:nvPr/>
         </p:nvSpPr>
@@ -3675,7 +3557,7 @@
 
 <file path=ppt/slides/slide3.xml><?xml version="1.0" encoding="utf-8"?>
 <p:sld xmlns:a="http://schemas.openxmlformats.org/drawingml/2006/main" xmlns:r="http://schemas.openxmlformats.org/officeDocument/2006/relationships" xmlns:p="http://schemas.openxmlformats.org/presentationml/2006/main">
-  <p:cSld name="Slide 3">
+  <p:cSld>
     <p:spTree>
       <p:nvGrpSpPr>
         <p:cNvPr id="1" name=""/>
@@ -3705,7 +3587,6 @@
             <a:avLst/>
           </a:prstGeom>
           <a:noFill/>
-          <a:ln/>
         </p:spPr>
         <p:txBody>
           <a:bodyPr wrap="none" lIns="0" tIns="0" rIns="0" bIns="0" rtlCol="0" anchor="t"/>
@@ -3722,9 +3603,9 @@
                 <a:solidFill>
                   <a:srgbClr val="383838"/>
                 </a:solidFill>
-                <a:latin typeface="Patrick Hand" pitchFamily="34" charset="0"/>
-                <a:ea typeface="Patrick Hand" pitchFamily="34" charset="-122"/>
-                <a:cs typeface="Patrick Hand" pitchFamily="34" charset="-120"/>
+                <a:latin typeface="Patrick Hand" panose="00000500000000000000" pitchFamily="34" charset="0"/>
+                <a:ea typeface="Patrick Hand" panose="00000500000000000000" pitchFamily="34" charset="-122"/>
+                <a:cs typeface="Patrick Hand" panose="00000500000000000000" pitchFamily="34" charset="-120"/>
               </a:rPr>
               <a:t>Нумерация страниц и разделов</a:t>
             </a:r>
@@ -3747,7 +3628,6 @@
             <a:avLst/>
           </a:prstGeom>
           <a:noFill/>
-          <a:ln/>
         </p:spPr>
         <p:txBody>
           <a:bodyPr wrap="none" lIns="0" tIns="0" rIns="0" bIns="0" rtlCol="0" anchor="t"/>
@@ -3764,9 +3644,9 @@
                 <a:solidFill>
                   <a:srgbClr val="383838"/>
                 </a:solidFill>
-                <a:latin typeface="Patrick Hand" pitchFamily="34" charset="0"/>
-                <a:ea typeface="Patrick Hand" pitchFamily="34" charset="-122"/>
-                <a:cs typeface="Patrick Hand" pitchFamily="34" charset="-120"/>
+                <a:latin typeface="Patrick Hand" panose="00000500000000000000" pitchFamily="34" charset="0"/>
+                <a:ea typeface="Patrick Hand" panose="00000500000000000000" pitchFamily="34" charset="-122"/>
+                <a:cs typeface="Patrick Hand" panose="00000500000000000000" pitchFamily="34" charset="-120"/>
               </a:rPr>
               <a:t>3. Нумерация страниц и материалов</a:t>
             </a:r>
@@ -3789,7 +3669,6 @@
             <a:avLst/>
           </a:prstGeom>
           <a:noFill/>
-          <a:ln/>
         </p:spPr>
         <p:txBody>
           <a:bodyPr wrap="square" lIns="0" tIns="0" rIns="0" bIns="0" rtlCol="0" anchor="t"/>
@@ -3807,9 +3686,9 @@
                 <a:solidFill>
                   <a:srgbClr val="383838"/>
                 </a:solidFill>
-                <a:latin typeface="Patrick Hand" pitchFamily="34" charset="0"/>
-                <a:ea typeface="Patrick Hand" pitchFamily="34" charset="-122"/>
-                <a:cs typeface="Patrick Hand" pitchFamily="34" charset="-120"/>
+                <a:latin typeface="Patrick Hand" panose="00000500000000000000" pitchFamily="34" charset="0"/>
+                <a:ea typeface="Patrick Hand" panose="00000500000000000000" pitchFamily="34" charset="-122"/>
+                <a:cs typeface="Patrick Hand" panose="00000500000000000000" pitchFamily="34" charset="-120"/>
               </a:rPr>
               <a:t>Сквозная нумерация страниц по всей работе (включая титульный лист и приложения). Титульный лист считается первой страницей, но номер на нём не проставляют. Номера страниц — в верхнем колонтитуле по центру, без точки.</a:t>
             </a:r>
@@ -3832,7 +3711,6 @@
             <a:avLst/>
           </a:prstGeom>
           <a:noFill/>
-          <a:ln/>
         </p:spPr>
         <p:txBody>
           <a:bodyPr wrap="square" lIns="0" tIns="0" rIns="0" bIns="0" rtlCol="0" anchor="t"/>
@@ -3850,9 +3728,9 @@
                 <a:solidFill>
                   <a:srgbClr val="383838"/>
                 </a:solidFill>
-                <a:latin typeface="Patrick Hand" pitchFamily="34" charset="0"/>
-                <a:ea typeface="Patrick Hand" pitchFamily="34" charset="-122"/>
-                <a:cs typeface="Patrick Hand" pitchFamily="34" charset="-120"/>
+                <a:latin typeface="Patrick Hand" panose="00000500000000000000" pitchFamily="34" charset="0"/>
+                <a:ea typeface="Patrick Hand" panose="00000500000000000000" pitchFamily="34" charset="-122"/>
+                <a:cs typeface="Patrick Hand" panose="00000500000000000000" pitchFamily="34" charset="-120"/>
               </a:rPr>
               <a:t>Иллюстрации, таблицы и распечатки на отдельных листах включаются в общую нумерацию; листы формата A3 считаются за одну страницу.</a:t>
             </a:r>
@@ -3875,7 +3753,6 @@
             <a:avLst/>
           </a:prstGeom>
           <a:noFill/>
-          <a:ln/>
         </p:spPr>
         <p:txBody>
           <a:bodyPr wrap="square" lIns="0" tIns="0" rIns="0" bIns="0" rtlCol="0" anchor="t"/>
@@ -3893,9 +3770,9 @@
                 <a:solidFill>
                   <a:srgbClr val="383838"/>
                 </a:solidFill>
-                <a:latin typeface="Patrick Hand" pitchFamily="34" charset="0"/>
-                <a:ea typeface="Patrick Hand" pitchFamily="34" charset="-122"/>
-                <a:cs typeface="Patrick Hand" pitchFamily="34" charset="-120"/>
+                <a:latin typeface="Patrick Hand" panose="00000500000000000000" pitchFamily="34" charset="0"/>
+                <a:ea typeface="Patrick Hand" panose="00000500000000000000" pitchFamily="34" charset="-122"/>
+                <a:cs typeface="Patrick Hand" panose="00000500000000000000" pitchFamily="34" charset="-120"/>
               </a:rPr>
               <a:t>На отдельном листе (альбомной ориентации) колонтитулы не меняют положение.</a:t>
             </a:r>
@@ -3918,7 +3795,6 @@
             <a:avLst/>
           </a:prstGeom>
           <a:noFill/>
-          <a:ln/>
         </p:spPr>
         <p:txBody>
           <a:bodyPr wrap="none" lIns="0" tIns="0" rIns="0" bIns="0" rtlCol="0" anchor="t"/>
@@ -3935,9 +3811,9 @@
                 <a:solidFill>
                   <a:srgbClr val="383838"/>
                 </a:solidFill>
-                <a:latin typeface="Patrick Hand" pitchFamily="34" charset="0"/>
-                <a:ea typeface="Patrick Hand" pitchFamily="34" charset="-122"/>
-                <a:cs typeface="Patrick Hand" pitchFamily="34" charset="-120"/>
+                <a:latin typeface="Patrick Hand" panose="00000500000000000000" pitchFamily="34" charset="0"/>
+                <a:ea typeface="Patrick Hand" panose="00000500000000000000" pitchFamily="34" charset="-122"/>
+                <a:cs typeface="Patrick Hand" panose="00000500000000000000" pitchFamily="34" charset="-120"/>
               </a:rPr>
               <a:t>4. Нумерация разделов и подразделов</a:t>
             </a:r>
@@ -3960,7 +3836,6 @@
             <a:avLst/>
           </a:prstGeom>
           <a:noFill/>
-          <a:ln/>
         </p:spPr>
         <p:txBody>
           <a:bodyPr wrap="none" lIns="0" tIns="0" rIns="0" bIns="0" rtlCol="0" anchor="t"/>
@@ -3978,9 +3853,9 @@
                 <a:solidFill>
                   <a:srgbClr val="383838"/>
                 </a:solidFill>
-                <a:latin typeface="Patrick Hand" pitchFamily="34" charset="0"/>
-                <a:ea typeface="Patrick Hand" pitchFamily="34" charset="-122"/>
-                <a:cs typeface="Patrick Hand" pitchFamily="34" charset="-120"/>
+                <a:latin typeface="Patrick Hand" panose="00000500000000000000" pitchFamily="34" charset="0"/>
+                <a:ea typeface="Patrick Hand" panose="00000500000000000000" pitchFamily="34" charset="-122"/>
+                <a:cs typeface="Patrick Hand" panose="00000500000000000000" pitchFamily="34" charset="-120"/>
               </a:rPr>
               <a:t>Нумерация — арабскими цифрами (без знака №).</a:t>
             </a:r>
@@ -4003,7 +3878,6 @@
             <a:avLst/>
           </a:prstGeom>
           <a:noFill/>
-          <a:ln/>
         </p:spPr>
         <p:txBody>
           <a:bodyPr wrap="none" lIns="0" tIns="0" rIns="0" bIns="0" rtlCol="0" anchor="t"/>
@@ -4021,9 +3895,9 @@
                 <a:solidFill>
                   <a:srgbClr val="383838"/>
                 </a:solidFill>
-                <a:latin typeface="Patrick Hand" pitchFamily="34" charset="0"/>
-                <a:ea typeface="Patrick Hand" pitchFamily="34" charset="-122"/>
-                <a:cs typeface="Patrick Hand" pitchFamily="34" charset="-120"/>
+                <a:latin typeface="Patrick Hand" panose="00000500000000000000" pitchFamily="34" charset="0"/>
+                <a:ea typeface="Patrick Hand" panose="00000500000000000000" pitchFamily="34" charset="-122"/>
+                <a:cs typeface="Patrick Hand" panose="00000500000000000000" pitchFamily="34" charset="-120"/>
               </a:rPr>
               <a:t>Разделы основной части нумеруются 1., 2., 3. и т.д.</a:t>
             </a:r>
@@ -4046,7 +3920,6 @@
             <a:avLst/>
           </a:prstGeom>
           <a:noFill/>
-          <a:ln/>
         </p:spPr>
         <p:txBody>
           <a:bodyPr wrap="square" lIns="0" tIns="0" rIns="0" bIns="0" rtlCol="0" anchor="t"/>
@@ -4064,9 +3937,9 @@
                 <a:solidFill>
                   <a:srgbClr val="383838"/>
                 </a:solidFill>
-                <a:latin typeface="Patrick Hand" pitchFamily="34" charset="0"/>
-                <a:ea typeface="Patrick Hand" pitchFamily="34" charset="-122"/>
-                <a:cs typeface="Patrick Hand" pitchFamily="34" charset="-120"/>
+                <a:latin typeface="Patrick Hand" panose="00000500000000000000" pitchFamily="34" charset="0"/>
+                <a:ea typeface="Patrick Hand" panose="00000500000000000000" pitchFamily="34" charset="-122"/>
+                <a:cs typeface="Patrick Hand" panose="00000500000000000000" pitchFamily="34" charset="-120"/>
               </a:rPr>
               <a:t>Пункты и подпункты нумеруются по иерархии: например, 1.1., 1.1.1., 1.1.1.1. и т.д.</a:t>
             </a:r>
@@ -4089,7 +3962,6 @@
             <a:avLst/>
           </a:prstGeom>
           <a:noFill/>
-          <a:ln/>
         </p:spPr>
         <p:txBody>
           <a:bodyPr wrap="square" lIns="0" tIns="0" rIns="0" bIns="0" rtlCol="0" anchor="t"/>
@@ -4107,9 +3979,9 @@
                 <a:solidFill>
                   <a:srgbClr val="383838"/>
                 </a:solidFill>
-                <a:latin typeface="Patrick Hand" pitchFamily="34" charset="0"/>
-                <a:ea typeface="Patrick Hand" pitchFamily="34" charset="-122"/>
-                <a:cs typeface="Patrick Hand" pitchFamily="34" charset="-120"/>
+                <a:latin typeface="Patrick Hand" panose="00000500000000000000" pitchFamily="34" charset="0"/>
+                <a:ea typeface="Patrick Hand" panose="00000500000000000000" pitchFamily="34" charset="-122"/>
+                <a:cs typeface="Patrick Hand" panose="00000500000000000000" pitchFamily="34" charset="-120"/>
               </a:rPr>
               <a:t>Оглавление, перечень условных обозначений, введение, выводы и список литературы не нумеруются.</a:t>
             </a:r>
@@ -4132,7 +4004,6 @@
             <a:avLst/>
           </a:prstGeom>
           <a:noFill/>
-          <a:ln/>
         </p:spPr>
         <p:txBody>
           <a:bodyPr wrap="square" lIns="0" tIns="0" rIns="0" bIns="0" rtlCol="0" anchor="t"/>
@@ -4150,9 +4021,9 @@
                 <a:solidFill>
                   <a:srgbClr val="383838"/>
                 </a:solidFill>
-                <a:latin typeface="Patrick Hand" pitchFamily="34" charset="0"/>
-                <a:ea typeface="Patrick Hand" pitchFamily="34" charset="-122"/>
-                <a:cs typeface="Patrick Hand" pitchFamily="34" charset="-120"/>
+                <a:latin typeface="Patrick Hand" panose="00000500000000000000" pitchFamily="34" charset="0"/>
+                <a:ea typeface="Patrick Hand" panose="00000500000000000000" pitchFamily="34" charset="-122"/>
+                <a:cs typeface="Patrick Hand" panose="00000500000000000000" pitchFamily="34" charset="-120"/>
               </a:rPr>
               <a:t>Если раздел содержит единственный пункт (или пункт — единственный подпункт), нумерование пунктов/подпунктов не выполняют.</a:t>
             </a:r>
@@ -4162,13 +4033,7 @@
       </p:sp>
       <p:sp>
         <p:nvSpPr>
-          <p:cNvPr id="13" name="Прямоугольник 12">
-            <a:extLst>
-              <a:ext uri="{FF2B5EF4-FFF2-40B4-BE49-F238E27FC236}">
-                <a16:creationId xmlns:a16="http://schemas.microsoft.com/office/drawing/2014/main" id="{BFA13F35-D1B9-4168-974A-066F596543F1}"/>
-              </a:ext>
-            </a:extLst>
-          </p:cNvPr>
+          <p:cNvPr id="13" name="Прямоугольник 12"/>
           <p:cNvSpPr/>
           <p:nvPr/>
         </p:nvSpPr>
@@ -4224,7 +4089,7 @@
 
 <file path=ppt/slides/slide4.xml><?xml version="1.0" encoding="utf-8"?>
 <p:sld xmlns:a="http://schemas.openxmlformats.org/drawingml/2006/main" xmlns:r="http://schemas.openxmlformats.org/officeDocument/2006/relationships" xmlns:p="http://schemas.openxmlformats.org/presentationml/2006/main">
-  <p:cSld name="Slide 4">
+  <p:cSld>
     <p:spTree>
       <p:nvGrpSpPr>
         <p:cNvPr id="1" name=""/>
@@ -4254,7 +4119,6 @@
             <a:avLst/>
           </a:prstGeom>
           <a:noFill/>
-          <a:ln/>
         </p:spPr>
         <p:txBody>
           <a:bodyPr wrap="none" lIns="0" tIns="0" rIns="0" bIns="0" rtlCol="0" anchor="t"/>
@@ -4271,9 +4135,9 @@
                 <a:solidFill>
                   <a:srgbClr val="383838"/>
                 </a:solidFill>
-                <a:latin typeface="Patrick Hand" pitchFamily="34" charset="0"/>
-                <a:ea typeface="Patrick Hand" pitchFamily="34" charset="-122"/>
-                <a:cs typeface="Patrick Hand" pitchFamily="34" charset="-120"/>
+                <a:latin typeface="Patrick Hand" panose="00000500000000000000" pitchFamily="34" charset="0"/>
+                <a:ea typeface="Patrick Hand" panose="00000500000000000000" pitchFamily="34" charset="-122"/>
+                <a:cs typeface="Patrick Hand" panose="00000500000000000000" pitchFamily="34" charset="-120"/>
               </a:rPr>
               <a:t>5. Заголовки</a:t>
             </a:r>
@@ -4327,7 +4191,6 @@
           <a:solidFill>
             <a:srgbClr val="CCCCCC"/>
           </a:solidFill>
-          <a:ln/>
         </p:spPr>
       </p:sp>
       <p:sp>
@@ -4345,7 +4208,6 @@
             <a:avLst/>
           </a:prstGeom>
           <a:noFill/>
-          <a:ln/>
         </p:spPr>
         <p:txBody>
           <a:bodyPr wrap="none" lIns="0" tIns="0" rIns="0" bIns="0" rtlCol="0" anchor="t"/>
@@ -4362,9 +4224,9 @@
                 <a:solidFill>
                   <a:srgbClr val="383838"/>
                 </a:solidFill>
-                <a:latin typeface="Patrick Hand" pitchFamily="34" charset="0"/>
-                <a:ea typeface="Patrick Hand" pitchFamily="34" charset="-122"/>
-                <a:cs typeface="Patrick Hand" pitchFamily="34" charset="-120"/>
+                <a:latin typeface="Patrick Hand" panose="00000500000000000000" pitchFamily="34" charset="0"/>
+                <a:ea typeface="Patrick Hand" panose="00000500000000000000" pitchFamily="34" charset="-122"/>
+                <a:cs typeface="Patrick Hand" panose="00000500000000000000" pitchFamily="34" charset="-120"/>
               </a:rPr>
               <a:t>Заголовки разделов и глав</a:t>
             </a:r>
@@ -4387,7 +4249,6 @@
             <a:avLst/>
           </a:prstGeom>
           <a:noFill/>
-          <a:ln/>
         </p:spPr>
         <p:txBody>
           <a:bodyPr wrap="square" lIns="0" tIns="0" rIns="0" bIns="0" rtlCol="0" anchor="t"/>
@@ -4404,9 +4265,9 @@
                 <a:solidFill>
                   <a:srgbClr val="383838"/>
                 </a:solidFill>
-                <a:latin typeface="Patrick Hand" pitchFamily="34" charset="0"/>
-                <a:ea typeface="Patrick Hand" pitchFamily="34" charset="-122"/>
-                <a:cs typeface="Patrick Hand" pitchFamily="34" charset="-120"/>
+                <a:latin typeface="Patrick Hand" panose="00000500000000000000" pitchFamily="34" charset="0"/>
+                <a:ea typeface="Patrick Hand" panose="00000500000000000000" pitchFamily="34" charset="-122"/>
+                <a:cs typeface="Patrick Hand" panose="00000500000000000000" pitchFamily="34" charset="-120"/>
               </a:rPr>
               <a:t>Печатаются прописными буквами, симметрично тексту.</a:t>
             </a:r>
@@ -4460,7 +4321,6 @@
           <a:solidFill>
             <a:srgbClr val="CCCCCC"/>
           </a:solidFill>
-          <a:ln/>
         </p:spPr>
       </p:sp>
       <p:sp>
@@ -4478,7 +4338,6 @@
             <a:avLst/>
           </a:prstGeom>
           <a:noFill/>
-          <a:ln/>
         </p:spPr>
         <p:txBody>
           <a:bodyPr wrap="none" lIns="0" tIns="0" rIns="0" bIns="0" rtlCol="0" anchor="t"/>
@@ -4495,9 +4354,9 @@
                 <a:solidFill>
                   <a:srgbClr val="383838"/>
                 </a:solidFill>
-                <a:latin typeface="Patrick Hand" pitchFamily="34" charset="0"/>
-                <a:ea typeface="Patrick Hand" pitchFamily="34" charset="-122"/>
-                <a:cs typeface="Patrick Hand" pitchFamily="34" charset="-120"/>
+                <a:latin typeface="Patrick Hand" panose="00000500000000000000" pitchFamily="34" charset="0"/>
+                <a:ea typeface="Patrick Hand" panose="00000500000000000000" pitchFamily="34" charset="-122"/>
+                <a:cs typeface="Patrick Hand" panose="00000500000000000000" pitchFamily="34" charset="-120"/>
               </a:rPr>
               <a:t>Заголовки подразделов</a:t>
             </a:r>
@@ -4520,7 +4379,6 @@
             <a:avLst/>
           </a:prstGeom>
           <a:noFill/>
-          <a:ln/>
         </p:spPr>
         <p:txBody>
           <a:bodyPr wrap="square" lIns="0" tIns="0" rIns="0" bIns="0" rtlCol="0" anchor="t"/>
@@ -4537,9 +4395,9 @@
                 <a:solidFill>
                   <a:srgbClr val="383838"/>
                 </a:solidFill>
-                <a:latin typeface="Patrick Hand" pitchFamily="34" charset="0"/>
-                <a:ea typeface="Patrick Hand" pitchFamily="34" charset="-122"/>
-                <a:cs typeface="Patrick Hand" pitchFamily="34" charset="-120"/>
+                <a:latin typeface="Patrick Hand" panose="00000500000000000000" pitchFamily="34" charset="0"/>
+                <a:ea typeface="Patrick Hand" panose="00000500000000000000" pitchFamily="34" charset="-122"/>
+                <a:cs typeface="Patrick Hand" panose="00000500000000000000" pitchFamily="34" charset="-120"/>
               </a:rPr>
               <a:t>Строчными буквами (с прописной первой буквой), с абзацного отступа и выделением жирным; точка в конце заголовка не ставится.</a:t>
             </a:r>
@@ -4593,7 +4451,6 @@
           <a:solidFill>
             <a:srgbClr val="CCCCCC"/>
           </a:solidFill>
-          <a:ln/>
         </p:spPr>
       </p:sp>
       <p:sp>
@@ -4611,7 +4468,6 @@
             <a:avLst/>
           </a:prstGeom>
           <a:noFill/>
-          <a:ln/>
         </p:spPr>
         <p:txBody>
           <a:bodyPr wrap="none" lIns="0" tIns="0" rIns="0" bIns="0" rtlCol="0" anchor="t"/>
@@ -4628,9 +4484,9 @@
                 <a:solidFill>
                   <a:srgbClr val="383838"/>
                 </a:solidFill>
-                <a:latin typeface="Patrick Hand" pitchFamily="34" charset="0"/>
-                <a:ea typeface="Patrick Hand" pitchFamily="34" charset="-122"/>
-                <a:cs typeface="Patrick Hand" pitchFamily="34" charset="-120"/>
+                <a:latin typeface="Patrick Hand" panose="00000500000000000000" pitchFamily="34" charset="0"/>
+                <a:ea typeface="Patrick Hand" panose="00000500000000000000" pitchFamily="34" charset="-122"/>
+                <a:cs typeface="Patrick Hand" panose="00000500000000000000" pitchFamily="34" charset="-120"/>
               </a:rPr>
               <a:t>Заголовки пунктов</a:t>
             </a:r>
@@ -4653,7 +4509,6 @@
             <a:avLst/>
           </a:prstGeom>
           <a:noFill/>
-          <a:ln/>
         </p:spPr>
         <p:txBody>
           <a:bodyPr wrap="square" lIns="0" tIns="0" rIns="0" bIns="0" rtlCol="0" anchor="t"/>
@@ -4670,9 +4525,9 @@
                 <a:solidFill>
                   <a:srgbClr val="383838"/>
                 </a:solidFill>
-                <a:latin typeface="Patrick Hand" pitchFamily="34" charset="0"/>
-                <a:ea typeface="Patrick Hand" pitchFamily="34" charset="-122"/>
-                <a:cs typeface="Patrick Hand" pitchFamily="34" charset="-120"/>
+                <a:latin typeface="Patrick Hand" panose="00000500000000000000" pitchFamily="34" charset="0"/>
+                <a:ea typeface="Patrick Hand" panose="00000500000000000000" pitchFamily="34" charset="-122"/>
+                <a:cs typeface="Patrick Hand" panose="00000500000000000000" pitchFamily="34" charset="-120"/>
               </a:rPr>
               <a:t>Строчными буквами (с прописной первой буквой) в разрядку; точка в конце заголовка, напечатанного в подбор к тексту, ставится.</a:t>
             </a:r>
@@ -4695,7 +4550,6 @@
             <a:avLst/>
           </a:prstGeom>
           <a:noFill/>
-          <a:ln/>
         </p:spPr>
         <p:txBody>
           <a:bodyPr wrap="square" lIns="0" tIns="0" rIns="0" bIns="0" rtlCol="0" anchor="t"/>
@@ -4712,9 +4566,9 @@
                 <a:solidFill>
                   <a:srgbClr val="383838"/>
                 </a:solidFill>
-                <a:latin typeface="Patrick Hand" pitchFamily="34" charset="0"/>
-                <a:ea typeface="Patrick Hand" pitchFamily="34" charset="-122"/>
-                <a:cs typeface="Patrick Hand" pitchFamily="34" charset="-120"/>
+                <a:latin typeface="Patrick Hand" panose="00000500000000000000" pitchFamily="34" charset="0"/>
+                <a:ea typeface="Patrick Hand" panose="00000500000000000000" pitchFamily="34" charset="-122"/>
+                <a:cs typeface="Patrick Hand" panose="00000500000000000000" pitchFamily="34" charset="-120"/>
               </a:rPr>
               <a:t>Переносы слов в заголовках запрещены. Расстояние между заголовком (кроме заголовка пункта) и текстом — не менее одной свободной строки.</a:t>
             </a:r>
@@ -4724,13 +4578,7 @@
       </p:sp>
       <p:sp>
         <p:nvSpPr>
-          <p:cNvPr id="16" name="Прямоугольник 15">
-            <a:extLst>
-              <a:ext uri="{FF2B5EF4-FFF2-40B4-BE49-F238E27FC236}">
-                <a16:creationId xmlns:a16="http://schemas.microsoft.com/office/drawing/2014/main" id="{6DCA0915-2063-4551-9CE9-D4B43FDD0A70}"/>
-              </a:ext>
-            </a:extLst>
-          </p:cNvPr>
+          <p:cNvPr id="16" name="Прямоугольник 15"/>
           <p:cNvSpPr/>
           <p:nvPr/>
         </p:nvSpPr>
@@ -4786,7 +4634,7 @@
 
 <file path=ppt/slides/slide5.xml><?xml version="1.0" encoding="utf-8"?>
 <p:sld xmlns:a="http://schemas.openxmlformats.org/drawingml/2006/main" xmlns:r="http://schemas.openxmlformats.org/officeDocument/2006/relationships" xmlns:p="http://schemas.openxmlformats.org/presentationml/2006/main">
-  <p:cSld name="Slide 5">
+  <p:cSld>
     <p:spTree>
       <p:nvGrpSpPr>
         <p:cNvPr id="1" name=""/>
@@ -4816,7 +4664,6 @@
             <a:avLst/>
           </a:prstGeom>
           <a:noFill/>
-          <a:ln/>
         </p:spPr>
         <p:txBody>
           <a:bodyPr wrap="none" lIns="0" tIns="0" rIns="0" bIns="0" rtlCol="0" anchor="t"/>
@@ -4833,9 +4680,9 @@
                 <a:solidFill>
                   <a:srgbClr val="383838"/>
                 </a:solidFill>
-                <a:latin typeface="Patrick Hand" pitchFamily="34" charset="0"/>
-                <a:ea typeface="Patrick Hand" pitchFamily="34" charset="-122"/>
-                <a:cs typeface="Patrick Hand" pitchFamily="34" charset="-120"/>
+                <a:latin typeface="Patrick Hand" panose="00000500000000000000" pitchFamily="34" charset="0"/>
+                <a:ea typeface="Patrick Hand" panose="00000500000000000000" pitchFamily="34" charset="-122"/>
+                <a:cs typeface="Patrick Hand" panose="00000500000000000000" pitchFamily="34" charset="-120"/>
               </a:rPr>
               <a:t>6. Иллюстрации и таблицы</a:t>
             </a:r>
@@ -4858,7 +4705,6 @@
             <a:avLst/>
           </a:prstGeom>
           <a:noFill/>
-          <a:ln/>
         </p:spPr>
         <p:txBody>
           <a:bodyPr wrap="none" lIns="0" tIns="0" rIns="0" bIns="0" rtlCol="0" anchor="t"/>
@@ -4875,9 +4721,9 @@
                 <a:solidFill>
                   <a:srgbClr val="383838"/>
                 </a:solidFill>
-                <a:latin typeface="Patrick Hand" pitchFamily="34" charset="0"/>
-                <a:ea typeface="Patrick Hand" pitchFamily="34" charset="-122"/>
-                <a:cs typeface="Patrick Hand" pitchFamily="34" charset="-120"/>
+                <a:latin typeface="Patrick Hand" panose="00000500000000000000" pitchFamily="34" charset="0"/>
+                <a:ea typeface="Patrick Hand" panose="00000500000000000000" pitchFamily="34" charset="-122"/>
+                <a:cs typeface="Patrick Hand" panose="00000500000000000000" pitchFamily="34" charset="-120"/>
               </a:rPr>
               <a:t>Иллюстрации</a:t>
             </a:r>
@@ -4900,7 +4746,6 @@
             <a:avLst/>
           </a:prstGeom>
           <a:noFill/>
-          <a:ln/>
         </p:spPr>
         <p:txBody>
           <a:bodyPr wrap="square" lIns="0" tIns="0" rIns="0" bIns="0" rtlCol="0" anchor="t"/>
@@ -4918,9 +4763,9 @@
                 <a:solidFill>
                   <a:srgbClr val="383838"/>
                 </a:solidFill>
-                <a:latin typeface="Patrick Hand" pitchFamily="34" charset="0"/>
-                <a:ea typeface="Patrick Hand" pitchFamily="34" charset="-122"/>
-                <a:cs typeface="Patrick Hand" pitchFamily="34" charset="-120"/>
+                <a:latin typeface="Patrick Hand" panose="00000500000000000000" pitchFamily="34" charset="0"/>
+                <a:ea typeface="Patrick Hand" panose="00000500000000000000" pitchFamily="34" charset="-122"/>
+                <a:cs typeface="Patrick Hand" panose="00000500000000000000" pitchFamily="34" charset="-120"/>
               </a:rPr>
               <a:t>Размещают сразу после первого упоминания в тексте или на следующей странице; на все иллюстрации должны быть ссылки в тексте («(рис. 3)», «… как видно на рис. 3» и т.д.).</a:t>
             </a:r>
@@ -4943,7 +4788,6 @@
             <a:avLst/>
           </a:prstGeom>
           <a:noFill/>
-          <a:ln/>
         </p:spPr>
         <p:txBody>
           <a:bodyPr wrap="square" lIns="0" tIns="0" rIns="0" bIns="0" rtlCol="0" anchor="t"/>
@@ -4961,9 +4805,9 @@
                 <a:solidFill>
                   <a:srgbClr val="383838"/>
                 </a:solidFill>
-                <a:latin typeface="Patrick Hand" pitchFamily="34" charset="0"/>
-                <a:ea typeface="Patrick Hand" pitchFamily="34" charset="-122"/>
-                <a:cs typeface="Patrick Hand" pitchFamily="34" charset="-120"/>
+                <a:latin typeface="Patrick Hand" panose="00000500000000000000" pitchFamily="34" charset="0"/>
+                <a:ea typeface="Patrick Hand" panose="00000500000000000000" pitchFamily="34" charset="-122"/>
+                <a:cs typeface="Patrick Hand" panose="00000500000000000000" pitchFamily="34" charset="-120"/>
               </a:rPr>
               <a:t>Нумеруются в пределах всей работы: «Рис. N. Название». Подрисуночные подписи и пояснения — под иллюстрацией. Если в работе одна иллюстрация, её не нумеруют и слово «Рис.» не пишут.</a:t>
             </a:r>
@@ -4980,7 +4824,7 @@
           <p:nvPr/>
         </p:nvPicPr>
         <p:blipFill>
-          <a:blip r:embed="rId3"/>
+          <a:blip r:embed="rId1"/>
           <a:stretch>
             <a:fillRect/>
           </a:stretch>
@@ -5010,7 +4854,6 @@
             <a:avLst/>
           </a:prstGeom>
           <a:noFill/>
-          <a:ln/>
         </p:spPr>
         <p:txBody>
           <a:bodyPr wrap="none" lIns="0" tIns="0" rIns="0" bIns="0" rtlCol="0" anchor="t"/>
@@ -5027,9 +4870,9 @@
                 <a:solidFill>
                   <a:srgbClr val="383838"/>
                 </a:solidFill>
-                <a:latin typeface="Patrick Hand" pitchFamily="34" charset="0"/>
-                <a:ea typeface="Patrick Hand" pitchFamily="34" charset="-122"/>
-                <a:cs typeface="Patrick Hand" pitchFamily="34" charset="-120"/>
+                <a:latin typeface="Patrick Hand" panose="00000500000000000000" pitchFamily="34" charset="0"/>
+                <a:ea typeface="Patrick Hand" panose="00000500000000000000" pitchFamily="34" charset="-122"/>
+                <a:cs typeface="Patrick Hand" panose="00000500000000000000" pitchFamily="34" charset="-120"/>
               </a:rPr>
               <a:t>Таблицы</a:t>
             </a:r>
@@ -5052,7 +4895,6 @@
             <a:avLst/>
           </a:prstGeom>
           <a:noFill/>
-          <a:ln/>
         </p:spPr>
         <p:txBody>
           <a:bodyPr wrap="square" lIns="0" tIns="0" rIns="0" bIns="0" rtlCol="0" anchor="t"/>
@@ -5070,9 +4912,9 @@
                 <a:solidFill>
                   <a:srgbClr val="383838"/>
                 </a:solidFill>
-                <a:latin typeface="Patrick Hand" pitchFamily="34" charset="0"/>
-                <a:ea typeface="Patrick Hand" pitchFamily="34" charset="-122"/>
-                <a:cs typeface="Patrick Hand" pitchFamily="34" charset="-120"/>
+                <a:latin typeface="Patrick Hand" panose="00000500000000000000" pitchFamily="34" charset="0"/>
+                <a:ea typeface="Patrick Hand" panose="00000500000000000000" pitchFamily="34" charset="-122"/>
+                <a:cs typeface="Patrick Hand" panose="00000500000000000000" pitchFamily="34" charset="-120"/>
               </a:rPr>
               <a:t>Оформляют так, чтобы их можно было читать без поворота работы (или с поворотом по часовой стрелке). Нумеруются арабскими цифрами по всей работе; над таблицей справа указывают «Таблица N». Заголовок таблицы помещают над таблицей, симметрично тексту.</a:t>
             </a:r>
@@ -5095,7 +4937,6 @@
             <a:avLst/>
           </a:prstGeom>
           <a:noFill/>
-          <a:ln/>
         </p:spPr>
         <p:txBody>
           <a:bodyPr wrap="square" lIns="0" tIns="0" rIns="0" bIns="0" rtlCol="0" anchor="t"/>
@@ -5113,9 +4954,9 @@
                 <a:solidFill>
                   <a:srgbClr val="383838"/>
                 </a:solidFill>
-                <a:latin typeface="Patrick Hand" pitchFamily="34" charset="0"/>
-                <a:ea typeface="Patrick Hand" pitchFamily="34" charset="-122"/>
-                <a:cs typeface="Patrick Hand" pitchFamily="34" charset="-120"/>
+                <a:latin typeface="Patrick Hand" panose="00000500000000000000" pitchFamily="34" charset="0"/>
+                <a:ea typeface="Patrick Hand" panose="00000500000000000000" pitchFamily="34" charset="-122"/>
+                <a:cs typeface="Patrick Hand" panose="00000500000000000000" pitchFamily="34" charset="-120"/>
               </a:rPr>
               <a:t>При переносе таблицы на другую страницу заголовок помещают только над первой частью, а над последующими частями пишут «Продолжение табл. N». При длинных таблицах повторяют шапку на каждой новом листе.</a:t>
             </a:r>
@@ -5138,7 +4979,6 @@
             <a:avLst/>
           </a:prstGeom>
           <a:noFill/>
-          <a:ln/>
         </p:spPr>
         <p:txBody>
           <a:bodyPr wrap="square" lIns="0" tIns="0" rIns="0" bIns="0" rtlCol="0" anchor="t"/>
@@ -5156,9 +4996,9 @@
                 <a:solidFill>
                   <a:srgbClr val="383838"/>
                 </a:solidFill>
-                <a:latin typeface="Patrick Hand" pitchFamily="34" charset="0"/>
-                <a:ea typeface="Patrick Hand" pitchFamily="34" charset="-122"/>
-                <a:cs typeface="Patrick Hand" pitchFamily="34" charset="-120"/>
+                <a:latin typeface="Patrick Hand" panose="00000500000000000000" pitchFamily="34" charset="0"/>
+                <a:ea typeface="Patrick Hand" panose="00000500000000000000" pitchFamily="34" charset="-122"/>
+                <a:cs typeface="Patrick Hand" panose="00000500000000000000" pitchFamily="34" charset="-120"/>
               </a:rPr>
               <a:t>Для повторяющегося текста в графах применяются правила замены («То же», кавычки и т.д.). В таблице допускается шрифт менее 12 pt и одинарный межстрочный интервал.</a:t>
             </a:r>
@@ -5168,13 +5008,7 @@
       </p:sp>
       <p:sp>
         <p:nvSpPr>
-          <p:cNvPr id="11" name="Прямоугольник 10">
-            <a:extLst>
-              <a:ext uri="{FF2B5EF4-FFF2-40B4-BE49-F238E27FC236}">
-                <a16:creationId xmlns:a16="http://schemas.microsoft.com/office/drawing/2014/main" id="{57260B9A-0D98-4CEE-BF30-C691CB45D948}"/>
-              </a:ext>
-            </a:extLst>
-          </p:cNvPr>
+          <p:cNvPr id="11" name="Прямоугольник 10"/>
           <p:cNvSpPr/>
           <p:nvPr/>
         </p:nvSpPr>
@@ -5230,7 +5064,7 @@
 
 <file path=ppt/slides/slide6.xml><?xml version="1.0" encoding="utf-8"?>
 <p:sld xmlns:a="http://schemas.openxmlformats.org/drawingml/2006/main" xmlns:r="http://schemas.openxmlformats.org/officeDocument/2006/relationships" xmlns:p="http://schemas.openxmlformats.org/presentationml/2006/main">
-  <p:cSld name="Slide 6">
+  <p:cSld>
     <p:spTree>
       <p:nvGrpSpPr>
         <p:cNvPr id="1" name=""/>
@@ -5260,7 +5094,6 @@
             <a:avLst/>
           </a:prstGeom>
           <a:noFill/>
-          <a:ln/>
         </p:spPr>
         <p:txBody>
           <a:bodyPr wrap="none" lIns="0" tIns="0" rIns="0" bIns="0" rtlCol="0" anchor="t"/>
@@ -5277,9 +5110,9 @@
                 <a:solidFill>
                   <a:srgbClr val="383838"/>
                 </a:solidFill>
-                <a:latin typeface="Patrick Hand" pitchFamily="34" charset="0"/>
-                <a:ea typeface="Patrick Hand" pitchFamily="34" charset="-122"/>
-                <a:cs typeface="Patrick Hand" pitchFamily="34" charset="-120"/>
+                <a:latin typeface="Patrick Hand" panose="00000500000000000000" pitchFamily="34" charset="0"/>
+                <a:ea typeface="Patrick Hand" panose="00000500000000000000" pitchFamily="34" charset="-122"/>
+                <a:cs typeface="Patrick Hand" panose="00000500000000000000" pitchFamily="34" charset="-120"/>
               </a:rPr>
               <a:t>Формулы, ссылки и библиография</a:t>
             </a:r>
@@ -5306,7 +5139,6 @@
           <a:solidFill>
             <a:srgbClr val="F7F7F7"/>
           </a:solidFill>
-          <a:ln/>
         </p:spPr>
       </p:sp>
       <p:sp>
@@ -5328,7 +5160,6 @@
           <a:solidFill>
             <a:srgbClr val="CCCCCC"/>
           </a:solidFill>
-          <a:ln/>
         </p:spPr>
       </p:sp>
       <p:sp>
@@ -5350,7 +5181,6 @@
           <a:solidFill>
             <a:srgbClr val="CCCCCC"/>
           </a:solidFill>
-          <a:ln/>
         </p:spPr>
       </p:sp>
       <p:sp>
@@ -5368,7 +5198,6 @@
             <a:avLst/>
           </a:prstGeom>
           <a:noFill/>
-          <a:ln/>
         </p:spPr>
         <p:txBody>
           <a:bodyPr wrap="none" lIns="0" tIns="0" rIns="0" bIns="0" rtlCol="0" anchor="t"/>
@@ -5385,9 +5214,9 @@
                 <a:solidFill>
                   <a:srgbClr val="000000"/>
                 </a:solidFill>
-                <a:latin typeface="Patrick Hand" pitchFamily="34" charset="0"/>
-                <a:ea typeface="Patrick Hand" pitchFamily="34" charset="-122"/>
-                <a:cs typeface="Patrick Hand" pitchFamily="34" charset="-120"/>
+                <a:latin typeface="Patrick Hand" panose="00000500000000000000" pitchFamily="34" charset="0"/>
+                <a:ea typeface="Patrick Hand" panose="00000500000000000000" pitchFamily="34" charset="-122"/>
+                <a:cs typeface="Patrick Hand" panose="00000500000000000000" pitchFamily="34" charset="-120"/>
               </a:rPr>
               <a:t>1</a:t>
             </a:r>
@@ -5410,7 +5239,6 @@
             <a:avLst/>
           </a:prstGeom>
           <a:noFill/>
-          <a:ln/>
         </p:spPr>
         <p:txBody>
           <a:bodyPr wrap="none" lIns="0" tIns="0" rIns="0" bIns="0" rtlCol="0" anchor="t"/>
@@ -5427,9 +5255,9 @@
                 <a:solidFill>
                   <a:srgbClr val="383838"/>
                 </a:solidFill>
-                <a:latin typeface="Patrick Hand" pitchFamily="34" charset="0"/>
-                <a:ea typeface="Patrick Hand" pitchFamily="34" charset="-122"/>
-                <a:cs typeface="Patrick Hand" pitchFamily="34" charset="-120"/>
+                <a:latin typeface="Patrick Hand" panose="00000500000000000000" pitchFamily="34" charset="0"/>
+                <a:ea typeface="Patrick Hand" panose="00000500000000000000" pitchFamily="34" charset="-122"/>
+                <a:cs typeface="Patrick Hand" panose="00000500000000000000" pitchFamily="34" charset="-120"/>
               </a:rPr>
               <a:t>7. Формулы и уравнения</a:t>
             </a:r>
@@ -5452,7 +5280,6 @@
             <a:avLst/>
           </a:prstGeom>
           <a:noFill/>
-          <a:ln/>
         </p:spPr>
         <p:txBody>
           <a:bodyPr wrap="square" lIns="0" tIns="0" rIns="0" bIns="0" rtlCol="0" anchor="t"/>
@@ -5469,9 +5296,9 @@
                 <a:solidFill>
                   <a:srgbClr val="383838"/>
                 </a:solidFill>
-                <a:latin typeface="Patrick Hand" pitchFamily="34" charset="0"/>
-                <a:ea typeface="Patrick Hand" pitchFamily="34" charset="-122"/>
-                <a:cs typeface="Patrick Hand" pitchFamily="34" charset="-120"/>
+                <a:latin typeface="Patrick Hand" panose="00000500000000000000" pitchFamily="34" charset="0"/>
+                <a:ea typeface="Patrick Hand" panose="00000500000000000000" pitchFamily="34" charset="-122"/>
+                <a:cs typeface="Patrick Hand" panose="00000500000000000000" pitchFamily="34" charset="-120"/>
               </a:rPr>
               <a:t>Формулы выделяют строкой, над и под формулой — минимум одна свободная строка. Если формула не умещается — переносят после знака «=», «+», «−», «×», «:».</a:t>
             </a:r>
@@ -5494,7 +5321,6 @@
             <a:avLst/>
           </a:prstGeom>
           <a:noFill/>
-          <a:ln/>
         </p:spPr>
         <p:txBody>
           <a:bodyPr wrap="square" lIns="0" tIns="0" rIns="0" bIns="0" rtlCol="0" anchor="t"/>
@@ -5511,9 +5337,9 @@
                 <a:solidFill>
                   <a:srgbClr val="383838"/>
                 </a:solidFill>
-                <a:latin typeface="Patrick Hand" pitchFamily="34" charset="0"/>
-                <a:ea typeface="Patrick Hand" pitchFamily="34" charset="-122"/>
-                <a:cs typeface="Patrick Hand" pitchFamily="34" charset="-120"/>
+                <a:latin typeface="Patrick Hand" panose="00000500000000000000" pitchFamily="34" charset="0"/>
+                <a:ea typeface="Patrick Hand" panose="00000500000000000000" pitchFamily="34" charset="-122"/>
+                <a:cs typeface="Patrick Hand" panose="00000500000000000000" pitchFamily="34" charset="-120"/>
               </a:rPr>
               <a:t>Формулы нумеруются в пределах всей работы (номер в круглых скобках у правого поля, напр.: (3)). Если формула не требует дальнейшей ссылки — её можно не нумеровать.</a:t>
             </a:r>
@@ -5536,7 +5362,6 @@
             <a:avLst/>
           </a:prstGeom>
           <a:noFill/>
-          <a:ln/>
         </p:spPr>
         <p:txBody>
           <a:bodyPr wrap="square" lIns="0" tIns="0" rIns="0" bIns="0" rtlCol="0" anchor="t"/>
@@ -5553,9 +5378,9 @@
                 <a:solidFill>
                   <a:srgbClr val="383838"/>
                 </a:solidFill>
-                <a:latin typeface="Patrick Hand" pitchFamily="34" charset="0"/>
-                <a:ea typeface="Patrick Hand" pitchFamily="34" charset="-122"/>
-                <a:cs typeface="Patrick Hand" pitchFamily="34" charset="-120"/>
+                <a:latin typeface="Patrick Hand" panose="00000500000000000000" pitchFamily="34" charset="0"/>
+                <a:ea typeface="Patrick Hand" panose="00000500000000000000" pitchFamily="34" charset="-122"/>
+                <a:cs typeface="Patrick Hand" panose="00000500000000000000" pitchFamily="34" charset="-120"/>
               </a:rPr>
               <a:t>Пояснение символов и коэффициентов даётся под формулой, каждое с новой строки, в той же последовательности, что и в формуле.</a:t>
             </a:r>
@@ -5582,7 +5407,6 @@
           <a:solidFill>
             <a:srgbClr val="F7F7F7"/>
           </a:solidFill>
-          <a:ln/>
         </p:spPr>
       </p:sp>
       <p:sp>
@@ -5604,7 +5428,6 @@
           <a:solidFill>
             <a:srgbClr val="CCCCCC"/>
           </a:solidFill>
-          <a:ln/>
         </p:spPr>
       </p:sp>
       <p:sp>
@@ -5626,7 +5449,6 @@
           <a:solidFill>
             <a:srgbClr val="CCCCCC"/>
           </a:solidFill>
-          <a:ln/>
         </p:spPr>
       </p:sp>
       <p:sp>
@@ -5644,7 +5466,6 @@
             <a:avLst/>
           </a:prstGeom>
           <a:noFill/>
-          <a:ln/>
         </p:spPr>
         <p:txBody>
           <a:bodyPr wrap="none" lIns="0" tIns="0" rIns="0" bIns="0" rtlCol="0" anchor="t"/>
@@ -5661,9 +5482,9 @@
                 <a:solidFill>
                   <a:srgbClr val="000000"/>
                 </a:solidFill>
-                <a:latin typeface="Patrick Hand" pitchFamily="34" charset="0"/>
-                <a:ea typeface="Patrick Hand" pitchFamily="34" charset="-122"/>
-                <a:cs typeface="Patrick Hand" pitchFamily="34" charset="-120"/>
+                <a:latin typeface="Patrick Hand" panose="00000500000000000000" pitchFamily="34" charset="0"/>
+                <a:ea typeface="Patrick Hand" panose="00000500000000000000" pitchFamily="34" charset="-122"/>
+                <a:cs typeface="Patrick Hand" panose="00000500000000000000" pitchFamily="34" charset="-120"/>
               </a:rPr>
               <a:t>2</a:t>
             </a:r>
@@ -5686,7 +5507,6 @@
             <a:avLst/>
           </a:prstGeom>
           <a:noFill/>
-          <a:ln/>
         </p:spPr>
         <p:txBody>
           <a:bodyPr wrap="none" lIns="0" tIns="0" rIns="0" bIns="0" rtlCol="0" anchor="t"/>
@@ -5703,9 +5523,9 @@
                 <a:solidFill>
                   <a:srgbClr val="383838"/>
                 </a:solidFill>
-                <a:latin typeface="Patrick Hand" pitchFamily="34" charset="0"/>
-                <a:ea typeface="Patrick Hand" pitchFamily="34" charset="-122"/>
-                <a:cs typeface="Patrick Hand" pitchFamily="34" charset="-120"/>
+                <a:latin typeface="Patrick Hand" panose="00000500000000000000" pitchFamily="34" charset="0"/>
+                <a:ea typeface="Patrick Hand" panose="00000500000000000000" pitchFamily="34" charset="-122"/>
+                <a:cs typeface="Patrick Hand" panose="00000500000000000000" pitchFamily="34" charset="-120"/>
               </a:rPr>
               <a:t>8. Ссылки и библиография</a:t>
             </a:r>
@@ -5728,7 +5548,6 @@
             <a:avLst/>
           </a:prstGeom>
           <a:noFill/>
-          <a:ln/>
         </p:spPr>
         <p:txBody>
           <a:bodyPr wrap="square" lIns="0" tIns="0" rIns="0" bIns="0" rtlCol="0" anchor="t"/>
@@ -5745,9 +5564,9 @@
                 <a:solidFill>
                   <a:srgbClr val="383838"/>
                 </a:solidFill>
-                <a:latin typeface="Patrick Hand" pitchFamily="34" charset="0"/>
-                <a:ea typeface="Patrick Hand" pitchFamily="34" charset="-122"/>
-                <a:cs typeface="Patrick Hand" pitchFamily="34" charset="-120"/>
+                <a:latin typeface="Patrick Hand" panose="00000500000000000000" pitchFamily="34" charset="0"/>
+                <a:ea typeface="Patrick Hand" panose="00000500000000000000" pitchFamily="34" charset="-122"/>
+                <a:cs typeface="Patrick Hand" panose="00000500000000000000" pitchFamily="34" charset="-120"/>
               </a:rPr>
               <a:t>Ссылки в тексте указывают порядковым номером по списку литературы, выделенным в квадратных скобках, например [1].</a:t>
             </a:r>
@@ -5770,7 +5589,6 @@
             <a:avLst/>
           </a:prstGeom>
           <a:noFill/>
-          <a:ln/>
         </p:spPr>
         <p:txBody>
           <a:bodyPr wrap="square" lIns="0" tIns="0" rIns="0" bIns="0" rtlCol="0" anchor="t"/>
@@ -5787,9 +5605,9 @@
                 <a:solidFill>
                   <a:srgbClr val="383838"/>
                 </a:solidFill>
-                <a:latin typeface="Patrick Hand" pitchFamily="34" charset="0"/>
-                <a:ea typeface="Patrick Hand" pitchFamily="34" charset="-122"/>
-                <a:cs typeface="Patrick Hand" pitchFamily="34" charset="-120"/>
+                <a:latin typeface="Patrick Hand" panose="00000500000000000000" pitchFamily="34" charset="0"/>
+                <a:ea typeface="Patrick Hand" panose="00000500000000000000" pitchFamily="34" charset="-122"/>
+                <a:cs typeface="Patrick Hand" panose="00000500000000000000" pitchFamily="34" charset="-120"/>
               </a:rPr>
               <a:t>Ссылки на разделы, иллюстрации, формулы и т.д. дают по номерам: «в разд. 4», «по формуле (3)», «на рис. 8», «в приложении Б». Если в работе одна иллюстрация/таблица/формула/приложение — писать «в таблице», «по формуле» и т.д.</a:t>
             </a:r>
@@ -5812,7 +5630,6 @@
             <a:avLst/>
           </a:prstGeom>
           <a:noFill/>
-          <a:ln/>
         </p:spPr>
         <p:txBody>
           <a:bodyPr wrap="square" lIns="0" tIns="0" rIns="0" bIns="0" rtlCol="0" anchor="t"/>
@@ -5829,9 +5646,9 @@
                 <a:solidFill>
                   <a:srgbClr val="383838"/>
                 </a:solidFill>
-                <a:latin typeface="Patrick Hand" pitchFamily="34" charset="0"/>
-                <a:ea typeface="Patrick Hand" pitchFamily="34" charset="-122"/>
-                <a:cs typeface="Patrick Hand" pitchFamily="34" charset="-120"/>
+                <a:latin typeface="Patrick Hand" panose="00000500000000000000" pitchFamily="34" charset="0"/>
+                <a:ea typeface="Patrick Hand" panose="00000500000000000000" pitchFamily="34" charset="-122"/>
+                <a:cs typeface="Patrick Hand" panose="00000500000000000000" pitchFamily="34" charset="-120"/>
               </a:rPr>
               <a:t>Список литературы оформляют: по порядку появления ссылок, или в алфавитном/хронологическом порядке. Оформление записей — согласно требованиям (ГОСТ Р 7.0.100-2018 или стандарт колледжа). При использовании интернет-источников указывается полный URL.</a:t>
             </a:r>
@@ -5841,13 +5658,7 @@
       </p:sp>
       <p:sp>
         <p:nvSpPr>
-          <p:cNvPr id="19" name="Прямоугольник 18">
-            <a:extLst>
-              <a:ext uri="{FF2B5EF4-FFF2-40B4-BE49-F238E27FC236}">
-                <a16:creationId xmlns:a16="http://schemas.microsoft.com/office/drawing/2014/main" id="{6E18D411-769B-4C0C-AF61-A63AB9F3B8BD}"/>
-              </a:ext>
-            </a:extLst>
-          </p:cNvPr>
+          <p:cNvPr id="19" name="Прямоугольник 18"/>
           <p:cNvSpPr/>
           <p:nvPr/>
         </p:nvSpPr>
@@ -5903,7 +5714,7 @@
 
 <file path=ppt/slides/slide7.xml><?xml version="1.0" encoding="utf-8"?>
 <p:sld xmlns:a="http://schemas.openxmlformats.org/drawingml/2006/main" xmlns:r="http://schemas.openxmlformats.org/officeDocument/2006/relationships" xmlns:p="http://schemas.openxmlformats.org/presentationml/2006/main">
-  <p:cSld name="Slide 7">
+  <p:cSld>
     <p:spTree>
       <p:nvGrpSpPr>
         <p:cNvPr id="1" name=""/>
@@ -5927,7 +5738,7 @@
           <p:nvPr/>
         </p:nvPicPr>
         <p:blipFill>
-          <a:blip r:embed="rId3"/>
+          <a:blip r:embed="rId1"/>
           <a:stretch>
             <a:fillRect/>
           </a:stretch>
@@ -5957,7 +5768,6 @@
             <a:avLst/>
           </a:prstGeom>
           <a:noFill/>
-          <a:ln/>
         </p:spPr>
         <p:txBody>
           <a:bodyPr wrap="none" lIns="0" tIns="0" rIns="0" bIns="0" rtlCol="0" anchor="t"/>
@@ -5974,9 +5784,9 @@
                 <a:solidFill>
                   <a:srgbClr val="383838"/>
                 </a:solidFill>
-                <a:latin typeface="Patrick Hand" pitchFamily="34" charset="0"/>
-                <a:ea typeface="Patrick Hand" pitchFamily="34" charset="-122"/>
-                <a:cs typeface="Patrick Hand" pitchFamily="34" charset="-120"/>
+                <a:latin typeface="Patrick Hand" panose="00000500000000000000" pitchFamily="34" charset="0"/>
+                <a:ea typeface="Patrick Hand" panose="00000500000000000000" pitchFamily="34" charset="-122"/>
+                <a:cs typeface="Patrick Hand" panose="00000500000000000000" pitchFamily="34" charset="-120"/>
               </a:rPr>
               <a:t>9. Приложения</a:t>
             </a:r>
@@ -5999,7 +5809,6 @@
             <a:avLst/>
           </a:prstGeom>
           <a:noFill/>
-          <a:ln/>
         </p:spPr>
         <p:txBody>
           <a:bodyPr wrap="square" lIns="0" tIns="0" rIns="0" bIns="0" rtlCol="0" anchor="t"/>
@@ -6017,9 +5826,9 @@
                 <a:solidFill>
                   <a:srgbClr val="383838"/>
                 </a:solidFill>
-                <a:latin typeface="Patrick Hand" pitchFamily="34" charset="0"/>
-                <a:ea typeface="Patrick Hand" pitchFamily="34" charset="-122"/>
-                <a:cs typeface="Patrick Hand" pitchFamily="34" charset="-120"/>
+                <a:latin typeface="Patrick Hand" panose="00000500000000000000" pitchFamily="34" charset="0"/>
+                <a:ea typeface="Patrick Hand" panose="00000500000000000000" pitchFamily="34" charset="-122"/>
+                <a:cs typeface="Patrick Hand" panose="00000500000000000000" pitchFamily="34" charset="-120"/>
               </a:rPr>
               <a:t>Каждое приложение начинается с новой страницы; заголовок приложения печатают прописными буквами. В правом верхнем углу над заголовком указывают «ПРИЛОЖЕНИЕ».</a:t>
             </a:r>
@@ -6042,7 +5851,6 @@
             <a:avLst/>
           </a:prstGeom>
           <a:noFill/>
-          <a:ln/>
         </p:spPr>
         <p:txBody>
           <a:bodyPr wrap="square" lIns="0" tIns="0" rIns="0" bIns="0" rtlCol="0" anchor="t"/>
@@ -6060,9 +5868,9 @@
                 <a:solidFill>
                   <a:srgbClr val="383838"/>
                 </a:solidFill>
-                <a:latin typeface="Patrick Hand" pitchFamily="34" charset="0"/>
-                <a:ea typeface="Patrick Hand" pitchFamily="34" charset="-122"/>
-                <a:cs typeface="Patrick Hand" pitchFamily="34" charset="-120"/>
+                <a:latin typeface="Patrick Hand" panose="00000500000000000000" pitchFamily="34" charset="0"/>
+                <a:ea typeface="Patrick Hand" panose="00000500000000000000" pitchFamily="34" charset="-122"/>
+                <a:cs typeface="Patrick Hand" panose="00000500000000000000" pitchFamily="34" charset="-120"/>
               </a:rPr>
               <a:t>Приложения нумеруются арабскими цифрами, их содержание можно структурировать и нумеровать в пределах приложения. Иллюстрации, таблицы и формулы в приложениях нумеруются отдельно в пределах каждого приложения.</a:t>
             </a:r>
@@ -6085,7 +5893,6 @@
             <a:avLst/>
           </a:prstGeom>
           <a:noFill/>
-          <a:ln/>
         </p:spPr>
         <p:txBody>
           <a:bodyPr wrap="square" lIns="0" tIns="0" rIns="0" bIns="0" rtlCol="0" anchor="t"/>
@@ -6103,9 +5910,9 @@
                 <a:solidFill>
                   <a:srgbClr val="383838"/>
                 </a:solidFill>
-                <a:latin typeface="Patrick Hand" pitchFamily="34" charset="0"/>
-                <a:ea typeface="Patrick Hand" pitchFamily="34" charset="-122"/>
-                <a:cs typeface="Patrick Hand" pitchFamily="34" charset="-120"/>
+                <a:latin typeface="Patrick Hand" panose="00000500000000000000" pitchFamily="34" charset="0"/>
+                <a:ea typeface="Patrick Hand" panose="00000500000000000000" pitchFamily="34" charset="-122"/>
+                <a:cs typeface="Patrick Hand" panose="00000500000000000000" pitchFamily="34" charset="-120"/>
               </a:rPr>
               <a:t>Если приложение представляет собой документ со самостоятельным значением, его вкладывают в оригинале; на титульном листе вставляемого документа в правом верхнем углу печатают «ПРИЛОЖЕНИЕ» и его номер. Страницы такого документа включаются в общую нумерацию работы.</a:t>
             </a:r>
@@ -6123,7 +5930,7 @@
 
 <file path=ppt/slides/slide8.xml><?xml version="1.0" encoding="utf-8"?>
 <p:sld xmlns:a="http://schemas.openxmlformats.org/drawingml/2006/main" xmlns:r="http://schemas.openxmlformats.org/officeDocument/2006/relationships" xmlns:p="http://schemas.openxmlformats.org/presentationml/2006/main">
-  <p:cSld name="Slide 8">
+  <p:cSld>
     <p:spTree>
       <p:nvGrpSpPr>
         <p:cNvPr id="1" name=""/>
@@ -6153,7 +5960,6 @@
             <a:avLst/>
           </a:prstGeom>
           <a:noFill/>
-          <a:ln/>
         </p:spPr>
         <p:txBody>
           <a:bodyPr wrap="none" lIns="0" tIns="0" rIns="0" bIns="0" rtlCol="0" anchor="t"/>
@@ -6170,9 +5976,9 @@
                 <a:solidFill>
                   <a:srgbClr val="383838"/>
                 </a:solidFill>
-                <a:latin typeface="Patrick Hand" pitchFamily="34" charset="0"/>
-                <a:ea typeface="Patrick Hand" pitchFamily="34" charset="-122"/>
-                <a:cs typeface="Patrick Hand" pitchFamily="34" charset="-120"/>
+                <a:latin typeface="Patrick Hand" panose="00000500000000000000" pitchFamily="34" charset="0"/>
+                <a:ea typeface="Patrick Hand" panose="00000500000000000000" pitchFamily="34" charset="-122"/>
+                <a:cs typeface="Patrick Hand" panose="00000500000000000000" pitchFamily="34" charset="-120"/>
               </a:rPr>
               <a:t>10. Требования к содержанию основной части</a:t>
             </a:r>
@@ -6195,7 +6001,6 @@
             <a:avLst/>
           </a:prstGeom>
           <a:noFill/>
-          <a:ln/>
         </p:spPr>
         <p:txBody>
           <a:bodyPr wrap="square" lIns="0" tIns="0" rIns="0" bIns="0" rtlCol="0" anchor="t"/>
@@ -6212,9 +6017,9 @@
                 <a:solidFill>
                   <a:srgbClr val="383838"/>
                 </a:solidFill>
-                <a:latin typeface="Patrick Hand" pitchFamily="34" charset="0"/>
-                <a:ea typeface="Patrick Hand" pitchFamily="34" charset="-122"/>
-                <a:cs typeface="Patrick Hand" pitchFamily="34" charset="-120"/>
+                <a:latin typeface="Patrick Hand" panose="00000500000000000000" pitchFamily="34" charset="0"/>
+                <a:ea typeface="Patrick Hand" panose="00000500000000000000" pitchFamily="34" charset="-122"/>
+                <a:cs typeface="Patrick Hand" panose="00000500000000000000" pitchFamily="34" charset="-120"/>
               </a:rPr>
               <a:t>Основная часть — 60–70 % объёма работы; обычно 2–3 главы, каждая с введением, основной частью и краткими выводами.</a:t>
             </a:r>
@@ -6268,7 +6073,6 @@
           <a:solidFill>
             <a:srgbClr val="E6E6E6"/>
           </a:solidFill>
-          <a:ln/>
         </p:spPr>
       </p:sp>
       <p:sp>
@@ -6286,7 +6090,6 @@
             <a:avLst/>
           </a:prstGeom>
           <a:noFill/>
-          <a:ln/>
         </p:spPr>
         <p:txBody>
           <a:bodyPr wrap="none" lIns="0" tIns="0" rIns="0" bIns="0" rtlCol="0" anchor="t"/>
@@ -6303,9 +6106,9 @@
                 <a:solidFill>
                   <a:srgbClr val="383838"/>
                 </a:solidFill>
-                <a:latin typeface="Patrick Hand" pitchFamily="34" charset="0"/>
-                <a:ea typeface="Patrick Hand" pitchFamily="34" charset="-122"/>
-                <a:cs typeface="Patrick Hand" pitchFamily="34" charset="-120"/>
+                <a:latin typeface="Patrick Hand" panose="00000500000000000000" pitchFamily="34" charset="0"/>
+                <a:ea typeface="Patrick Hand" panose="00000500000000000000" pitchFamily="34" charset="-122"/>
+                <a:cs typeface="Patrick Hand" panose="00000500000000000000" pitchFamily="34" charset="-120"/>
               </a:rPr>
               <a:t>Глава 1: Теория и обзор</a:t>
             </a:r>
@@ -6328,7 +6131,6 @@
             <a:avLst/>
           </a:prstGeom>
           <a:noFill/>
-          <a:ln/>
         </p:spPr>
         <p:txBody>
           <a:bodyPr wrap="square" lIns="0" tIns="0" rIns="0" bIns="0" rtlCol="0" anchor="t"/>
@@ -6345,9 +6147,9 @@
                 <a:solidFill>
                   <a:srgbClr val="383838"/>
                 </a:solidFill>
-                <a:latin typeface="Patrick Hand" pitchFamily="34" charset="0"/>
-                <a:ea typeface="Patrick Hand" pitchFamily="34" charset="-122"/>
-                <a:cs typeface="Patrick Hand" pitchFamily="34" charset="-120"/>
+                <a:latin typeface="Patrick Hand" panose="00000500000000000000" pitchFamily="34" charset="0"/>
+                <a:ea typeface="Patrick Hand" panose="00000500000000000000" pitchFamily="34" charset="-122"/>
+                <a:cs typeface="Patrick Hand" panose="00000500000000000000" pitchFamily="34" charset="-120"/>
               </a:rPr>
               <a:t>Теоретические основы и аналитический обзор (10–20 % объёма).</a:t>
             </a:r>
@@ -6372,7 +6174,6 @@
           <a:solidFill>
             <a:srgbClr val="E6E6E6"/>
           </a:solidFill>
-          <a:ln/>
         </p:spPr>
       </p:sp>
       <p:sp>
@@ -6394,7 +6195,6 @@
           <a:solidFill>
             <a:srgbClr val="CCCCCC"/>
           </a:solidFill>
-          <a:ln/>
         </p:spPr>
       </p:sp>
       <p:sp>
@@ -6412,7 +6212,6 @@
             <a:avLst/>
           </a:prstGeom>
           <a:noFill/>
-          <a:ln/>
         </p:spPr>
         <p:txBody>
           <a:bodyPr wrap="square" lIns="0" tIns="0" rIns="0" bIns="0" rtlCol="0" anchor="t"/>
@@ -6429,9 +6228,9 @@
                 <a:solidFill>
                   <a:srgbClr val="383838"/>
                 </a:solidFill>
-                <a:latin typeface="Patrick Hand" pitchFamily="34" charset="0"/>
-                <a:ea typeface="Patrick Hand" pitchFamily="34" charset="-122"/>
-                <a:cs typeface="Patrick Hand" pitchFamily="34" charset="-120"/>
+                <a:latin typeface="Patrick Hand" panose="00000500000000000000" pitchFamily="34" charset="0"/>
+                <a:ea typeface="Patrick Hand" panose="00000500000000000000" pitchFamily="34" charset="-122"/>
+                <a:cs typeface="Patrick Hand" panose="00000500000000000000" pitchFamily="34" charset="-120"/>
               </a:rPr>
               <a:t>Глава 2: Инструментарий и методы</a:t>
             </a:r>
@@ -6454,7 +6253,6 @@
             <a:avLst/>
           </a:prstGeom>
           <a:noFill/>
-          <a:ln/>
         </p:spPr>
         <p:txBody>
           <a:bodyPr wrap="square" lIns="0" tIns="0" rIns="0" bIns="0" rtlCol="0" anchor="t"/>
@@ -6471,9 +6269,9 @@
                 <a:solidFill>
                   <a:srgbClr val="383838"/>
                 </a:solidFill>
-                <a:latin typeface="Patrick Hand" pitchFamily="34" charset="0"/>
-                <a:ea typeface="Patrick Hand" pitchFamily="34" charset="-122"/>
-                <a:cs typeface="Patrick Hand" pitchFamily="34" charset="-120"/>
+                <a:latin typeface="Patrick Hand" panose="00000500000000000000" pitchFamily="34" charset="0"/>
+                <a:ea typeface="Patrick Hand" panose="00000500000000000000" pitchFamily="34" charset="-122"/>
+                <a:cs typeface="Patrick Hand" panose="00000500000000000000" pitchFamily="34" charset="-120"/>
               </a:rPr>
               <a:t>Обоснование выбора технологий, архитектуры, методы тестирования (≈15–20 %).</a:t>
             </a:r>
@@ -6498,7 +6296,6 @@
           <a:solidFill>
             <a:srgbClr val="E6E6E6"/>
           </a:solidFill>
-          <a:ln/>
         </p:spPr>
       </p:sp>
       <p:sp>
@@ -6520,7 +6317,6 @@
           <a:solidFill>
             <a:srgbClr val="CCCCCC"/>
           </a:solidFill>
-          <a:ln/>
         </p:spPr>
       </p:sp>
       <p:sp>
@@ -6538,7 +6334,6 @@
             <a:avLst/>
           </a:prstGeom>
           <a:noFill/>
-          <a:ln/>
         </p:spPr>
         <p:txBody>
           <a:bodyPr wrap="square" lIns="0" tIns="0" rIns="0" bIns="0" rtlCol="0" anchor="t"/>
@@ -6555,9 +6350,9 @@
                 <a:solidFill>
                   <a:srgbClr val="383838"/>
                 </a:solidFill>
-                <a:latin typeface="Patrick Hand" pitchFamily="34" charset="0"/>
-                <a:ea typeface="Patrick Hand" pitchFamily="34" charset="-122"/>
-                <a:cs typeface="Patrick Hand" pitchFamily="34" charset="-120"/>
+                <a:latin typeface="Patrick Hand" panose="00000500000000000000" pitchFamily="34" charset="0"/>
+                <a:ea typeface="Patrick Hand" panose="00000500000000000000" pitchFamily="34" charset="-122"/>
+                <a:cs typeface="Patrick Hand" panose="00000500000000000000" pitchFamily="34" charset="-120"/>
               </a:rPr>
               <a:t>Глава 3: Практическая реализация</a:t>
             </a:r>
@@ -6580,7 +6375,6 @@
             <a:avLst/>
           </a:prstGeom>
           <a:noFill/>
-          <a:ln/>
         </p:spPr>
         <p:txBody>
           <a:bodyPr wrap="square" lIns="0" tIns="0" rIns="0" bIns="0" rtlCol="0" anchor="t"/>
@@ -6597,9 +6391,9 @@
                 <a:solidFill>
                   <a:srgbClr val="383838"/>
                 </a:solidFill>
-                <a:latin typeface="Patrick Hand" pitchFamily="34" charset="0"/>
-                <a:ea typeface="Patrick Hand" pitchFamily="34" charset="-122"/>
-                <a:cs typeface="Patrick Hand" pitchFamily="34" charset="-120"/>
+                <a:latin typeface="Patrick Hand" panose="00000500000000000000" pitchFamily="34" charset="0"/>
+                <a:ea typeface="Patrick Hand" panose="00000500000000000000" pitchFamily="34" charset="-122"/>
+                <a:cs typeface="Patrick Hand" panose="00000500000000000000" pitchFamily="34" charset="-120"/>
               </a:rPr>
               <a:t>Практическая реализация, тестирование и результаты (≈30–40 %, подробные примеры и скриншоты).</a:t>
             </a:r>
@@ -6626,7 +6420,6 @@
           <a:solidFill>
             <a:srgbClr val="D9D9D9"/>
           </a:solidFill>
-          <a:ln/>
         </p:spPr>
       </p:sp>
       <p:pic>
@@ -6638,7 +6431,7 @@
           <p:nvPr/>
         </p:nvPicPr>
         <p:blipFill>
-          <a:blip r:embed="rId3"/>
+          <a:blip r:embed="rId1"/>
           <a:stretch>
             <a:fillRect/>
           </a:stretch>
@@ -6668,7 +6461,6 @@
             <a:avLst/>
           </a:prstGeom>
           <a:noFill/>
-          <a:ln/>
         </p:spPr>
         <p:txBody>
           <a:bodyPr wrap="square" lIns="0" tIns="0" rIns="0" bIns="0" rtlCol="0" anchor="t"/>
@@ -6685,9 +6477,9 @@
                 <a:solidFill>
                   <a:srgbClr val="000000"/>
                 </a:solidFill>
-                <a:latin typeface="Patrick Hand" pitchFamily="34" charset="0"/>
-                <a:ea typeface="Patrick Hand" pitchFamily="34" charset="-122"/>
-                <a:cs typeface="Patrick Hand" pitchFamily="34" charset="-120"/>
+                <a:latin typeface="Patrick Hand" panose="00000500000000000000" pitchFamily="34" charset="0"/>
+                <a:ea typeface="Patrick Hand" panose="00000500000000000000" pitchFamily="34" charset="-122"/>
+                <a:cs typeface="Patrick Hand" panose="00000500000000000000" pitchFamily="34" charset="-120"/>
               </a:rPr>
               <a:t>В конце каждой главы — 5–7 предложений выводов. Язык — научно-деловой, без личных местоимений; формулировки — в безличной форме («было разработано», «проведено исследование»).</a:t>
             </a:r>
@@ -6697,13 +6489,7 @@
       </p:sp>
       <p:sp>
         <p:nvSpPr>
-          <p:cNvPr id="19" name="Прямоугольник 18">
-            <a:extLst>
-              <a:ext uri="{FF2B5EF4-FFF2-40B4-BE49-F238E27FC236}">
-                <a16:creationId xmlns:a16="http://schemas.microsoft.com/office/drawing/2014/main" id="{944DE004-4BA8-44C0-AB2B-DF98FA1B46D7}"/>
-              </a:ext>
-            </a:extLst>
-          </p:cNvPr>
+          <p:cNvPr id="19" name="Прямоугольник 18"/>
           <p:cNvSpPr/>
           <p:nvPr/>
         </p:nvSpPr>
@@ -6759,7 +6545,7 @@
 
 <file path=ppt/slides/slide9.xml><?xml version="1.0" encoding="utf-8"?>
 <p:sld xmlns:a="http://schemas.openxmlformats.org/drawingml/2006/main" xmlns:r="http://schemas.openxmlformats.org/officeDocument/2006/relationships" xmlns:p="http://schemas.openxmlformats.org/presentationml/2006/main">
-  <p:cSld name="Slide 9">
+  <p:cSld>
     <p:spTree>
       <p:nvGrpSpPr>
         <p:cNvPr id="1" name=""/>
@@ -6789,7 +6575,6 @@
             <a:avLst/>
           </a:prstGeom>
           <a:noFill/>
-          <a:ln/>
         </p:spPr>
         <p:txBody>
           <a:bodyPr wrap="none" lIns="0" tIns="0" rIns="0" bIns="0" rtlCol="0" anchor="t"/>
@@ -6806,9 +6591,9 @@
                 <a:solidFill>
                   <a:srgbClr val="383838"/>
                 </a:solidFill>
-                <a:latin typeface="Patrick Hand" pitchFamily="34" charset="0"/>
-                <a:ea typeface="Patrick Hand" pitchFamily="34" charset="-122"/>
-                <a:cs typeface="Patrick Hand" pitchFamily="34" charset="-120"/>
+                <a:latin typeface="Patrick Hand" panose="00000500000000000000" pitchFamily="34" charset="0"/>
+                <a:ea typeface="Patrick Hand" panose="00000500000000000000" pitchFamily="34" charset="-122"/>
+                <a:cs typeface="Patrick Hand" panose="00000500000000000000" pitchFamily="34" charset="-120"/>
               </a:rPr>
               <a:t>11. Объём, оригинальность и подача</a:t>
             </a:r>
@@ -6858,7 +6643,6 @@
             <a:avLst/>
           </a:prstGeom>
           <a:noFill/>
-          <a:ln/>
         </p:spPr>
         <p:txBody>
           <a:bodyPr wrap="none" lIns="0" tIns="0" rIns="0" bIns="0" rtlCol="0" anchor="t"/>
@@ -6875,9 +6659,9 @@
                 <a:solidFill>
                   <a:srgbClr val="383838"/>
                 </a:solidFill>
-                <a:latin typeface="Patrick Hand" pitchFamily="34" charset="0"/>
-                <a:ea typeface="Patrick Hand" pitchFamily="34" charset="-122"/>
-                <a:cs typeface="Patrick Hand" pitchFamily="34" charset="-120"/>
+                <a:latin typeface="Patrick Hand" panose="00000500000000000000" pitchFamily="34" charset="0"/>
+                <a:ea typeface="Patrick Hand" panose="00000500000000000000" pitchFamily="34" charset="-122"/>
+                <a:cs typeface="Patrick Hand" panose="00000500000000000000" pitchFamily="34" charset="-120"/>
               </a:rPr>
               <a:t>Объём</a:t>
             </a:r>
@@ -6900,7 +6684,6 @@
             <a:avLst/>
           </a:prstGeom>
           <a:noFill/>
-          <a:ln/>
         </p:spPr>
         <p:txBody>
           <a:bodyPr wrap="square" lIns="0" tIns="0" rIns="0" bIns="0" rtlCol="0" anchor="t"/>
@@ -6917,9 +6700,9 @@
                 <a:solidFill>
                   <a:srgbClr val="383838"/>
                 </a:solidFill>
-                <a:latin typeface="Patrick Hand" pitchFamily="34" charset="0"/>
-                <a:ea typeface="Patrick Hand" pitchFamily="34" charset="-122"/>
-                <a:cs typeface="Patrick Hand" pitchFamily="34" charset="-120"/>
+                <a:latin typeface="Patrick Hand" panose="00000500000000000000" pitchFamily="34" charset="0"/>
+                <a:ea typeface="Patrick Hand" panose="00000500000000000000" pitchFamily="34" charset="-122"/>
+                <a:cs typeface="Patrick Hand" panose="00000500000000000000" pitchFamily="34" charset="-120"/>
               </a:rPr>
               <a:t>Объём пояснительной записки: 30–50 страниц (без приложений).</a:t>
             </a:r>
@@ -6969,7 +6752,6 @@
             <a:avLst/>
           </a:prstGeom>
           <a:noFill/>
-          <a:ln/>
         </p:spPr>
         <p:txBody>
           <a:bodyPr wrap="none" lIns="0" tIns="0" rIns="0" bIns="0" rtlCol="0" anchor="t"/>
@@ -6986,9 +6768,9 @@
                 <a:solidFill>
                   <a:srgbClr val="383838"/>
                 </a:solidFill>
-                <a:latin typeface="Patrick Hand" pitchFamily="34" charset="0"/>
-                <a:ea typeface="Patrick Hand" pitchFamily="34" charset="-122"/>
-                <a:cs typeface="Patrick Hand" pitchFamily="34" charset="-120"/>
+                <a:latin typeface="Patrick Hand" panose="00000500000000000000" pitchFamily="34" charset="0"/>
+                <a:ea typeface="Patrick Hand" panose="00000500000000000000" pitchFamily="34" charset="-122"/>
+                <a:cs typeface="Patrick Hand" panose="00000500000000000000" pitchFamily="34" charset="-120"/>
               </a:rPr>
               <a:t>Оформление</a:t>
             </a:r>
@@ -7011,7 +6793,6 @@
             <a:avLst/>
           </a:prstGeom>
           <a:noFill/>
-          <a:ln/>
         </p:spPr>
         <p:txBody>
           <a:bodyPr wrap="square" lIns="0" tIns="0" rIns="0" bIns="0" rtlCol="0" anchor="t"/>
@@ -7028,9 +6809,9 @@
                 <a:solidFill>
                   <a:srgbClr val="383838"/>
                 </a:solidFill>
-                <a:latin typeface="Patrick Hand" pitchFamily="34" charset="0"/>
-                <a:ea typeface="Patrick Hand" pitchFamily="34" charset="-122"/>
-                <a:cs typeface="Patrick Hand" pitchFamily="34" charset="-120"/>
+                <a:latin typeface="Patrick Hand" panose="00000500000000000000" pitchFamily="34" charset="0"/>
+                <a:ea typeface="Patrick Hand" panose="00000500000000000000" pitchFamily="34" charset="-122"/>
+                <a:cs typeface="Patrick Hand" panose="00000500000000000000" pitchFamily="34" charset="-120"/>
               </a:rPr>
               <a:t>Оформление по стандарту колледжа (ГОСТ, APA, IEEE и др.).</a:t>
             </a:r>
@@ -7080,7 +6861,6 @@
             <a:avLst/>
           </a:prstGeom>
           <a:noFill/>
-          <a:ln/>
         </p:spPr>
         <p:txBody>
           <a:bodyPr wrap="none" lIns="0" tIns="0" rIns="0" bIns="0" rtlCol="0" anchor="t"/>
@@ -7097,9 +6877,9 @@
                 <a:solidFill>
                   <a:srgbClr val="383838"/>
                 </a:solidFill>
-                <a:latin typeface="Patrick Hand" pitchFamily="34" charset="0"/>
-                <a:ea typeface="Patrick Hand" pitchFamily="34" charset="-122"/>
-                <a:cs typeface="Patrick Hand" pitchFamily="34" charset="-120"/>
+                <a:latin typeface="Patrick Hand" panose="00000500000000000000" pitchFamily="34" charset="0"/>
+                <a:ea typeface="Patrick Hand" panose="00000500000000000000" pitchFamily="34" charset="-122"/>
+                <a:cs typeface="Patrick Hand" panose="00000500000000000000" pitchFamily="34" charset="-120"/>
               </a:rPr>
               <a:t>Уникальность</a:t>
             </a:r>
@@ -7122,7 +6902,6 @@
             <a:avLst/>
           </a:prstGeom>
           <a:noFill/>
-          <a:ln/>
         </p:spPr>
         <p:txBody>
           <a:bodyPr wrap="square" lIns="0" tIns="0" rIns="0" bIns="0" rtlCol="0" anchor="t"/>
@@ -7139,9 +6918,9 @@
                 <a:solidFill>
                   <a:srgbClr val="383838"/>
                 </a:solidFill>
-                <a:latin typeface="Patrick Hand" pitchFamily="34" charset="0"/>
-                <a:ea typeface="Patrick Hand" pitchFamily="34" charset="-122"/>
-                <a:cs typeface="Patrick Hand" pitchFamily="34" charset="-120"/>
+                <a:latin typeface="Patrick Hand" panose="00000500000000000000" pitchFamily="34" charset="0"/>
+                <a:ea typeface="Patrick Hand" panose="00000500000000000000" pitchFamily="34" charset="-122"/>
+                <a:cs typeface="Patrick Hand" panose="00000500000000000000" pitchFamily="34" charset="-120"/>
               </a:rPr>
               <a:t>Уникальность текста: не менее 70 % (проверка в Antiplagiat, eTXT). Цитирование допускается с указанием источника.</a:t>
             </a:r>
@@ -7191,7 +6970,6 @@
             <a:avLst/>
           </a:prstGeom>
           <a:noFill/>
-          <a:ln/>
         </p:spPr>
         <p:txBody>
           <a:bodyPr wrap="none" lIns="0" tIns="0" rIns="0" bIns="0" rtlCol="0" anchor="t"/>
@@ -7208,9 +6986,9 @@
                 <a:solidFill>
                   <a:srgbClr val="383838"/>
                 </a:solidFill>
-                <a:latin typeface="Patrick Hand" pitchFamily="34" charset="0"/>
-                <a:ea typeface="Patrick Hand" pitchFamily="34" charset="-122"/>
-                <a:cs typeface="Patrick Hand" pitchFamily="34" charset="-120"/>
+                <a:latin typeface="Patrick Hand" panose="00000500000000000000" pitchFamily="34" charset="0"/>
+                <a:ea typeface="Patrick Hand" panose="00000500000000000000" pitchFamily="34" charset="-122"/>
+                <a:cs typeface="Patrick Hand" panose="00000500000000000000" pitchFamily="34" charset="-120"/>
               </a:rPr>
               <a:t>Подача</a:t>
             </a:r>
@@ -7233,7 +7011,6 @@
             <a:avLst/>
           </a:prstGeom>
           <a:noFill/>
-          <a:ln/>
         </p:spPr>
         <p:txBody>
           <a:bodyPr wrap="square" lIns="0" tIns="0" rIns="0" bIns="0" rtlCol="0" anchor="t"/>
@@ -7250,9 +7027,9 @@
                 <a:solidFill>
                   <a:srgbClr val="383838"/>
                 </a:solidFill>
-                <a:latin typeface="Patrick Hand" pitchFamily="34" charset="0"/>
-                <a:ea typeface="Patrick Hand" pitchFamily="34" charset="-122"/>
-                <a:cs typeface="Patrick Hand" pitchFamily="34" charset="-120"/>
+                <a:latin typeface="Patrick Hand" panose="00000500000000000000" pitchFamily="34" charset="0"/>
+                <a:ea typeface="Patrick Hand" panose="00000500000000000000" pitchFamily="34" charset="-122"/>
+                <a:cs typeface="Patrick Hand" panose="00000500000000000000" pitchFamily="34" charset="-120"/>
               </a:rPr>
               <a:t>По защите: подготовить презентацию 8–10 слайдов. Исходные файлы моделирования/программ обязателен, если проект их содержит. Проектный материал прилагают на носителе (CD/DVD) и на защите предоставляют переплётную версию по стандарту (белый цвет обложки; точные требования демонстрирует преподаватель).</a:t>
             </a:r>
@@ -7262,13 +7039,7 @@
       </p:sp>
       <p:sp>
         <p:nvSpPr>
-          <p:cNvPr id="15" name="Прямоугольник 14">
-            <a:extLst>
-              <a:ext uri="{FF2B5EF4-FFF2-40B4-BE49-F238E27FC236}">
-                <a16:creationId xmlns:a16="http://schemas.microsoft.com/office/drawing/2014/main" id="{B7CC47BE-71C5-4B42-B337-2009EF0BD303}"/>
-              </a:ext>
-            </a:extLst>
-          </p:cNvPr>
+          <p:cNvPr id="15" name="Прямоугольник 14"/>
           <p:cNvSpPr/>
           <p:nvPr/>
         </p:nvSpPr>
@@ -7365,7 +7136,7 @@
     </a:clrScheme>
     <a:fontScheme name="Office">
       <a:majorFont>
-        <a:latin typeface="Calibri Light" panose="020F0302020204030204"/>
+        <a:latin typeface="Calibri Light"/>
         <a:ea typeface=""/>
         <a:cs typeface=""/>
         <a:font script="Jpan" typeface="游ゴシック Light"/>
@@ -7398,26 +7169,9 @@
         <a:font script="Viet" typeface="Times New Roman"/>
         <a:font script="Uigh" typeface="Microsoft Uighur"/>
         <a:font script="Geor" typeface="Sylfaen"/>
-        <a:font script="Armn" typeface="Arial"/>
-        <a:font script="Bugi" typeface="Leelawadee UI"/>
-        <a:font script="Bopo" typeface="Microsoft JhengHei"/>
-        <a:font script="Java" typeface="Javanese Text"/>
-        <a:font script="Lisu" typeface="Segoe UI"/>
-        <a:font script="Mymr" typeface="Myanmar Text"/>
-        <a:font script="Nkoo" typeface="Ebrima"/>
-        <a:font script="Olck" typeface="Nirmala UI"/>
-        <a:font script="Osma" typeface="Ebrima"/>
-        <a:font script="Phag" typeface="Phagspa"/>
-        <a:font script="Syrn" typeface="Estrangelo Edessa"/>
-        <a:font script="Syrj" typeface="Estrangelo Edessa"/>
-        <a:font script="Syre" typeface="Estrangelo Edessa"/>
-        <a:font script="Sora" typeface="Nirmala UI"/>
-        <a:font script="Tale" typeface="Microsoft Tai Le"/>
-        <a:font script="Talu" typeface="Microsoft New Tai Lue"/>
-        <a:font script="Tfng" typeface="Ebrima"/>
       </a:majorFont>
       <a:minorFont>
-        <a:latin typeface="Calibri" panose="020F0502020204030204"/>
+        <a:latin typeface="Calibri"/>
         <a:ea typeface=""/>
         <a:cs typeface=""/>
         <a:font script="Jpan" typeface="游ゴシック"/>
@@ -7450,23 +7204,6 @@
         <a:font script="Viet" typeface="Arial"/>
         <a:font script="Uigh" typeface="Microsoft Uighur"/>
         <a:font script="Geor" typeface="Sylfaen"/>
-        <a:font script="Armn" typeface="Arial"/>
-        <a:font script="Bugi" typeface="Leelawadee UI"/>
-        <a:font script="Bopo" typeface="Microsoft JhengHei"/>
-        <a:font script="Java" typeface="Javanese Text"/>
-        <a:font script="Lisu" typeface="Segoe UI"/>
-        <a:font script="Mymr" typeface="Myanmar Text"/>
-        <a:font script="Nkoo" typeface="Ebrima"/>
-        <a:font script="Olck" typeface="Nirmala UI"/>
-        <a:font script="Osma" typeface="Ebrima"/>
-        <a:font script="Phag" typeface="Phagspa"/>
-        <a:font script="Syrn" typeface="Estrangelo Edessa"/>
-        <a:font script="Syrj" typeface="Estrangelo Edessa"/>
-        <a:font script="Syre" typeface="Estrangelo Edessa"/>
-        <a:font script="Sora" typeface="Nirmala UI"/>
-        <a:font script="Tale" typeface="Microsoft Tai Le"/>
-        <a:font script="Talu" typeface="Microsoft New Tai Lue"/>
-        <a:font script="Tfng" typeface="Ebrima"/>
       </a:minorFont>
     </a:fontScheme>
     <a:fmtScheme name="Office">
@@ -7607,8 +7344,6 @@
       </a:bgFillStyleLst>
     </a:fmtScheme>
   </a:themeElements>
-  <a:objectDefaults/>
-  <a:extraClrSchemeLst/>
   <a:extLst>
     <a:ext uri="{05A4C25C-085E-4340-85A3-A5531E510DB2}">
       <thm15:themeFamily xmlns:thm15="http://schemas.microsoft.com/office/thememl/2012/main" name="Office Theme" id="{62F939B6-93AF-4DB8-9C6B-D6C7DFDC589F}" vid="{4A3C46E8-61CC-4603-A589-7422A47A8E4A}"/>
@@ -7660,7 +7395,7 @@
     </a:clrScheme>
     <a:fontScheme name="Стандартная">
       <a:majorFont>
-        <a:latin typeface="Calibri Light" panose="020F0302020204030204"/>
+        <a:latin typeface="Calibri Light"/>
         <a:ea typeface=""/>
         <a:cs typeface=""/>
         <a:font script="Jpan" typeface="游ゴシック Light"/>
@@ -7693,26 +7428,9 @@
         <a:font script="Viet" typeface="Times New Roman"/>
         <a:font script="Uigh" typeface="Microsoft Uighur"/>
         <a:font script="Geor" typeface="Sylfaen"/>
-        <a:font script="Armn" typeface="Arial"/>
-        <a:font script="Bugi" typeface="Leelawadee UI"/>
-        <a:font script="Bopo" typeface="Microsoft JhengHei"/>
-        <a:font script="Java" typeface="Javanese Text"/>
-        <a:font script="Lisu" typeface="Segoe UI"/>
-        <a:font script="Mymr" typeface="Myanmar Text"/>
-        <a:font script="Nkoo" typeface="Ebrima"/>
-        <a:font script="Olck" typeface="Nirmala UI"/>
-        <a:font script="Osma" typeface="Ebrima"/>
-        <a:font script="Phag" typeface="Phagspa"/>
-        <a:font script="Syrn" typeface="Estrangelo Edessa"/>
-        <a:font script="Syrj" typeface="Estrangelo Edessa"/>
-        <a:font script="Syre" typeface="Estrangelo Edessa"/>
-        <a:font script="Sora" typeface="Nirmala UI"/>
-        <a:font script="Tale" typeface="Microsoft Tai Le"/>
-        <a:font script="Talu" typeface="Microsoft New Tai Lue"/>
-        <a:font script="Tfng" typeface="Ebrima"/>
       </a:majorFont>
       <a:minorFont>
-        <a:latin typeface="Calibri" panose="020F0502020204030204"/>
+        <a:latin typeface="Calibri"/>
         <a:ea typeface=""/>
         <a:cs typeface=""/>
         <a:font script="Jpan" typeface="游ゴシック"/>
@@ -7745,23 +7463,6 @@
         <a:font script="Viet" typeface="Arial"/>
         <a:font script="Uigh" typeface="Microsoft Uighur"/>
         <a:font script="Geor" typeface="Sylfaen"/>
-        <a:font script="Armn" typeface="Arial"/>
-        <a:font script="Bugi" typeface="Leelawadee UI"/>
-        <a:font script="Bopo" typeface="Microsoft JhengHei"/>
-        <a:font script="Java" typeface="Javanese Text"/>
-        <a:font script="Lisu" typeface="Segoe UI"/>
-        <a:font script="Mymr" typeface="Myanmar Text"/>
-        <a:font script="Nkoo" typeface="Ebrima"/>
-        <a:font script="Olck" typeface="Nirmala UI"/>
-        <a:font script="Osma" typeface="Ebrima"/>
-        <a:font script="Phag" typeface="Phagspa"/>
-        <a:font script="Syrn" typeface="Estrangelo Edessa"/>
-        <a:font script="Syrj" typeface="Estrangelo Edessa"/>
-        <a:font script="Syre" typeface="Estrangelo Edessa"/>
-        <a:font script="Sora" typeface="Nirmala UI"/>
-        <a:font script="Tale" typeface="Microsoft Tai Le"/>
-        <a:font script="Talu" typeface="Microsoft New Tai Lue"/>
-        <a:font script="Tfng" typeface="Ebrima"/>
       </a:minorFont>
     </a:fontScheme>
     <a:fmtScheme name="Стандартная">
@@ -7902,8 +7603,6 @@
       </a:bgFillStyleLst>
     </a:fmtScheme>
   </a:themeElements>
-  <a:objectDefaults/>
-  <a:extraClrSchemeLst/>
   <a:extLst>
     <a:ext uri="{05A4C25C-085E-4340-85A3-A5531E510DB2}">
       <thm15:themeFamily xmlns:thm15="http://schemas.microsoft.com/office/thememl/2012/main" name="Office Theme" id="{62F939B6-93AF-4DB8-9C6B-D6C7DFDC589F}" vid="{4A3C46E8-61CC-4603-A589-7422A47A8E4A}"/>
